--- a/ゲーム科2年/01_後期/ゲームAI概論/02_行動処理.pptx
+++ b/ゲーム科2年/01_後期/ゲームAI概論/02_行動処理.pptx
@@ -11,10 +11,6 @@
     <p:sldId id="260" r:id="rId5"/>
     <p:sldId id="261" r:id="rId6"/>
     <p:sldId id="262" r:id="rId7"/>
-    <p:sldId id="263" r:id="rId8"/>
-    <p:sldId id="264" r:id="rId9"/>
-    <p:sldId id="265" r:id="rId10"/>
-    <p:sldId id="266" r:id="rId11"/>
   </p:sldIdLst>
   <p:sldSz cx="12192000" cy="6858000"/>
   <p:notesSz cx="6858000" cy="9144000"/>
@@ -3638,7 +3634,7 @@
         <p:spPr>
           <a:xfrm>
             <a:off x="567542" y="491954"/>
-            <a:ext cx="5522666" cy="584775"/>
+            <a:ext cx="1826141" cy="584775"/>
           </a:xfrm>
           <a:prstGeom prst="rect">
             <a:avLst/>
@@ -3652,12 +3648,8 @@
           <a:lstStyle/>
           <a:p>
             <a:r>
-              <a:rPr kumimoji="1" lang="en-US" altLang="ja-JP" sz="3200" b="1" u="sng" dirty="0"/>
-              <a:t>AI</a:t>
-            </a:r>
-            <a:r>
               <a:rPr kumimoji="1" lang="ja-JP" altLang="en-US" sz="3200" b="1" u="sng" dirty="0"/>
-              <a:t>管理とストラテジークラス</a:t>
+              <a:t>行動処理</a:t>
             </a:r>
             <a:endParaRPr kumimoji="1" lang="en-US" altLang="ja-JP" sz="3200" b="1" u="sng" dirty="0"/>
           </a:p>
@@ -3678,7 +3670,7 @@
         <p:spPr>
           <a:xfrm>
             <a:off x="567542" y="1216429"/>
-            <a:ext cx="8186857" cy="1200329"/>
+            <a:ext cx="9708107" cy="830997"/>
           </a:xfrm>
           <a:prstGeom prst="rect">
             <a:avLst/>
@@ -3697,14 +3689,18 @@
             </a:r>
             <a:r>
               <a:rPr kumimoji="1" lang="ja-JP" altLang="en-US" sz="2400" dirty="0"/>
-              <a:t>をプログラムで実装します。</a:t>
+              <a:t>の設計について復習しましょう。</a:t>
             </a:r>
             <a:endParaRPr kumimoji="1" lang="en-US" altLang="ja-JP" sz="2400" dirty="0"/>
           </a:p>
           <a:p>
             <a:r>
+              <a:rPr lang="en-US" altLang="ja-JP" sz="2400" dirty="0"/>
+              <a:t>AI</a:t>
+            </a:r>
+            <a:r>
               <a:rPr lang="ja-JP" altLang="en-US" sz="2400" dirty="0"/>
-              <a:t>まずはこれまでと同じく</a:t>
+              <a:t>の実装には</a:t>
             </a:r>
             <a:r>
               <a:rPr lang="ja-JP" altLang="en-US" sz="2400" b="1" dirty="0">
@@ -3712,7 +3708,7 @@
                   <a:srgbClr val="FF0000"/>
                 </a:solidFill>
               </a:rPr>
-              <a:t>管理クラス</a:t>
+              <a:t>設計</a:t>
             </a:r>
             <a:r>
               <a:rPr lang="ja-JP" altLang="en-US" sz="2400" dirty="0"/>
@@ -3724,282 +3720,375 @@
                   <a:srgbClr val="FF0000"/>
                 </a:solidFill>
               </a:rPr>
-              <a:t>基底クラス</a:t>
+              <a:t>仕様を明確にする</a:t>
             </a:r>
             <a:r>
               <a:rPr lang="ja-JP" altLang="en-US" sz="2400" dirty="0"/>
-              <a:t>を作り、</a:t>
-            </a:r>
-            <a:endParaRPr lang="en-US" altLang="ja-JP" sz="2400" dirty="0"/>
-          </a:p>
-          <a:p>
-            <a:r>
-              <a:rPr kumimoji="1" lang="ja-JP" altLang="en-US" sz="2400" dirty="0"/>
-              <a:t>実装の土台を整えていきましょう。</a:t>
+              <a:t>ことが大事だったと思います。</a:t>
             </a:r>
             <a:endParaRPr kumimoji="1" lang="en-US" altLang="ja-JP" sz="2400" dirty="0"/>
           </a:p>
         </p:txBody>
       </p:sp>
-    </p:spTree>
-    <p:extLst>
-      <p:ext uri="{BB962C8B-B14F-4D97-AF65-F5344CB8AC3E}">
-        <p14:creationId xmlns:p14="http://schemas.microsoft.com/office/powerpoint/2010/main" val="38792862"/>
-      </p:ext>
-    </p:extLst>
-  </p:cSld>
-  <p:clrMapOvr>
-    <a:masterClrMapping/>
-  </p:clrMapOvr>
-</p:sld>
-</file>
-
-<file path=ppt/slides/slide10.xml><?xml version="1.0" encoding="utf-8"?>
-<p:sld xmlns:a="http://schemas.openxmlformats.org/drawingml/2006/main" xmlns:r="http://schemas.openxmlformats.org/officeDocument/2006/relationships" xmlns:p="http://schemas.openxmlformats.org/presentationml/2006/main">
-  <p:cSld>
-    <p:spTree>
-      <p:nvGrpSpPr>
-        <p:cNvPr id="1" name=""/>
-        <p:cNvGrpSpPr/>
-        <p:nvPr/>
-      </p:nvGrpSpPr>
-      <p:grpSpPr>
-        <a:xfrm>
-          <a:off x="0" y="0"/>
-          <a:ext cx="0" cy="0"/>
-          <a:chOff x="0" y="0"/>
-          <a:chExt cx="0" cy="0"/>
-        </a:xfrm>
-      </p:grpSpPr>
-      <p:sp>
-        <p:nvSpPr>
-          <p:cNvPr id="4" name="テキスト ボックス 3">
-            <a:extLst>
-              <a:ext uri="{FF2B5EF4-FFF2-40B4-BE49-F238E27FC236}">
-                <a16:creationId xmlns:a16="http://schemas.microsoft.com/office/drawing/2014/main" id="{5A13BF46-B8C5-48AA-8308-C9ECFF431A18}"/>
-              </a:ext>
-            </a:extLst>
-          </p:cNvPr>
-          <p:cNvSpPr txBox="1"/>
+      <p:sp>
+        <p:nvSpPr>
+          <p:cNvPr id="5" name="正方形/長方形 4">
+            <a:extLst>
+              <a:ext uri="{FF2B5EF4-FFF2-40B4-BE49-F238E27FC236}">
+                <a16:creationId xmlns:a16="http://schemas.microsoft.com/office/drawing/2014/main" id="{B3CF768A-6A86-4408-9599-917559891D06}"/>
+              </a:ext>
+            </a:extLst>
+          </p:cNvPr>
+          <p:cNvSpPr/>
           <p:nvPr/>
         </p:nvSpPr>
         <p:spPr>
           <a:xfrm>
-            <a:off x="567542" y="491954"/>
-            <a:ext cx="3877985" cy="584775"/>
-          </a:xfrm>
-          <a:prstGeom prst="rect">
-            <a:avLst/>
-          </a:prstGeom>
-          <a:noFill/>
-        </p:spPr>
-        <p:txBody>
-          <a:bodyPr wrap="none" rtlCol="0">
-            <a:spAutoFit/>
-          </a:bodyPr>
-          <a:lstStyle/>
-          <a:p>
-            <a:r>
-              <a:rPr kumimoji="1" lang="ja-JP" altLang="en-US" sz="3200" b="1" u="sng" dirty="0"/>
-              <a:t>ストラテジークラス</a:t>
-            </a:r>
-            <a:endParaRPr kumimoji="1" lang="en-US" altLang="ja-JP" sz="3200" b="1" u="sng" dirty="0"/>
-          </a:p>
-        </p:txBody>
-      </p:sp>
-      <p:sp>
-        <p:nvSpPr>
-          <p:cNvPr id="6" name="テキスト ボックス 5">
-            <a:extLst>
-              <a:ext uri="{FF2B5EF4-FFF2-40B4-BE49-F238E27FC236}">
-                <a16:creationId xmlns:a16="http://schemas.microsoft.com/office/drawing/2014/main" id="{55830AD6-028B-4C4E-80BF-B70DFC1C3A46}"/>
-              </a:ext>
-            </a:extLst>
-          </p:cNvPr>
-          <p:cNvSpPr txBox="1"/>
-          <p:nvPr/>
-        </p:nvSpPr>
-        <p:spPr>
-          <a:xfrm>
-            <a:off x="567542" y="1216429"/>
-            <a:ext cx="7832593" cy="830997"/>
-          </a:xfrm>
-          <a:prstGeom prst="rect">
-            <a:avLst/>
-          </a:prstGeom>
-          <a:noFill/>
-        </p:spPr>
-        <p:txBody>
-          <a:bodyPr wrap="none" rtlCol="0">
-            <a:spAutoFit/>
-          </a:bodyPr>
-          <a:lstStyle/>
-          <a:p>
-            <a:r>
-              <a:rPr kumimoji="1" lang="en-US" altLang="ja-JP" sz="2400" b="1" dirty="0" err="1">
-                <a:solidFill>
-                  <a:srgbClr val="0070C0"/>
-                </a:solidFill>
-              </a:rPr>
-              <a:t>ThinkStrategy</a:t>
-            </a:r>
-            <a:r>
-              <a:rPr kumimoji="1" lang="ja-JP" altLang="en-US" sz="2400" b="1" dirty="0">
-                <a:solidFill>
-                  <a:srgbClr val="0070C0"/>
-                </a:solidFill>
-              </a:rPr>
-              <a:t>関数</a:t>
-            </a:r>
-            <a:r>
-              <a:rPr kumimoji="1" lang="ja-JP" altLang="en-US" sz="2400" dirty="0"/>
-              <a:t>は</a:t>
-            </a:r>
-            <a:r>
-              <a:rPr kumimoji="1" lang="ja-JP" altLang="en-US" sz="2400" b="1" dirty="0">
-                <a:solidFill>
-                  <a:srgbClr val="FF0000"/>
-                </a:solidFill>
-              </a:rPr>
-              <a:t>戦略を考えて決定する関数</a:t>
-            </a:r>
-            <a:r>
-              <a:rPr kumimoji="1" lang="ja-JP" altLang="en-US" sz="2400" dirty="0"/>
-              <a:t>です。</a:t>
-            </a:r>
-            <a:endParaRPr kumimoji="1" lang="en-US" altLang="ja-JP" sz="2400" dirty="0"/>
-          </a:p>
-          <a:p>
-            <a:r>
-              <a:rPr kumimoji="1" lang="ja-JP" altLang="en-US" sz="2400" dirty="0"/>
-              <a:t>継承した</a:t>
-            </a:r>
-            <a:r>
-              <a:rPr kumimoji="1" lang="en-US" altLang="ja-JP" sz="2400" dirty="0"/>
-              <a:t>AI</a:t>
-            </a:r>
-            <a:r>
-              <a:rPr kumimoji="1" lang="ja-JP" altLang="en-US" sz="2400" dirty="0"/>
-              <a:t>クラスに合わせた処理を書いていきます。</a:t>
-            </a:r>
-            <a:endParaRPr kumimoji="1" lang="en-US" altLang="ja-JP" sz="2400" dirty="0"/>
-          </a:p>
-        </p:txBody>
-      </p:sp>
-      <p:pic>
-        <p:nvPicPr>
-          <p:cNvPr id="8" name="図 7">
-            <a:extLst>
-              <a:ext uri="{FF2B5EF4-FFF2-40B4-BE49-F238E27FC236}">
-                <a16:creationId xmlns:a16="http://schemas.microsoft.com/office/drawing/2014/main" id="{0F6E698D-F4A8-45E9-80E1-ED332F779A3D}"/>
-              </a:ext>
-            </a:extLst>
-          </p:cNvPr>
-          <p:cNvPicPr>
-            <a:picLocks noChangeAspect="1"/>
-          </p:cNvPicPr>
-          <p:nvPr/>
-        </p:nvPicPr>
-        <p:blipFill>
-          <a:blip r:embed="rId2"/>
-          <a:stretch>
-            <a:fillRect/>
-          </a:stretch>
-        </p:blipFill>
-        <p:spPr>
-          <a:xfrm>
-            <a:off x="567542" y="2187126"/>
-            <a:ext cx="8338358" cy="1129815"/>
+            <a:off x="4565801" y="2047426"/>
+            <a:ext cx="6400801" cy="2214282"/>
           </a:xfrm>
           <a:prstGeom prst="rect">
             <a:avLst/>
           </a:prstGeom>
         </p:spPr>
-      </p:pic>
-      <p:sp>
-        <p:nvSpPr>
-          <p:cNvPr id="13" name="テキスト ボックス 12">
-            <a:extLst>
-              <a:ext uri="{FF2B5EF4-FFF2-40B4-BE49-F238E27FC236}">
-                <a16:creationId xmlns:a16="http://schemas.microsoft.com/office/drawing/2014/main" id="{2D82E83B-2929-4C08-BFC0-FDA9E08718F0}"/>
-              </a:ext>
-            </a:extLst>
-          </p:cNvPr>
-          <p:cNvSpPr txBox="1"/>
+        <p:style>
+          <a:lnRef idx="2">
+            <a:schemeClr val="accent1">
+              <a:shade val="50000"/>
+            </a:schemeClr>
+          </a:lnRef>
+          <a:fillRef idx="1">
+            <a:schemeClr val="accent1"/>
+          </a:fillRef>
+          <a:effectRef idx="0">
+            <a:schemeClr val="accent1"/>
+          </a:effectRef>
+          <a:fontRef idx="minor">
+            <a:schemeClr val="lt1"/>
+          </a:fontRef>
+        </p:style>
+        <p:txBody>
+          <a:bodyPr rtlCol="0" anchor="t"/>
+          <a:lstStyle/>
+          <a:p>
+            <a:r>
+              <a:rPr lang="ja-JP" altLang="en-US" b="1" dirty="0"/>
+              <a:t>戦略</a:t>
+            </a:r>
+            <a:r>
+              <a:rPr lang="en-US" altLang="ja-JP" b="1" dirty="0"/>
+              <a:t>A</a:t>
+            </a:r>
+          </a:p>
+          <a:p>
+            <a:endParaRPr lang="en-US" altLang="ja-JP" b="1" dirty="0"/>
+          </a:p>
+          <a:p>
+            <a:r>
+              <a:rPr lang="ja-JP" altLang="en-US" b="1" dirty="0"/>
+              <a:t>・プレイヤーとの距離が遠ければ</a:t>
+            </a:r>
+            <a:r>
+              <a:rPr lang="ja-JP" altLang="en-US" b="1" dirty="0">
+                <a:solidFill>
+                  <a:srgbClr val="FFFF00"/>
+                </a:solidFill>
+              </a:rPr>
+              <a:t>プレイヤーに近づく</a:t>
+            </a:r>
+            <a:endParaRPr lang="en-US" altLang="ja-JP" b="1" dirty="0">
+              <a:solidFill>
+                <a:srgbClr val="FFFF00"/>
+              </a:solidFill>
+            </a:endParaRPr>
+          </a:p>
+          <a:p>
+            <a:r>
+              <a:rPr lang="ja-JP" altLang="en-US" b="1" dirty="0"/>
+              <a:t>・近くにアイテムが落ちていれば</a:t>
+            </a:r>
+            <a:r>
+              <a:rPr lang="ja-JP" altLang="en-US" b="1" dirty="0">
+                <a:solidFill>
+                  <a:srgbClr val="FFFF00"/>
+                </a:solidFill>
+              </a:rPr>
+              <a:t>アイテムを取りに行く</a:t>
+            </a:r>
+            <a:endParaRPr lang="en-US" altLang="ja-JP" b="1" dirty="0">
+              <a:solidFill>
+                <a:srgbClr val="FFFF00"/>
+              </a:solidFill>
+            </a:endParaRPr>
+          </a:p>
+          <a:p>
+            <a:r>
+              <a:rPr lang="ja-JP" altLang="en-US" b="1" dirty="0"/>
+              <a:t>・プレイヤーとの距離が近ければ</a:t>
+            </a:r>
+            <a:r>
+              <a:rPr lang="ja-JP" altLang="en-US" b="1" dirty="0">
+                <a:solidFill>
+                  <a:srgbClr val="FFFF00"/>
+                </a:solidFill>
+              </a:rPr>
+              <a:t>攻撃する</a:t>
+            </a:r>
+            <a:endParaRPr lang="en-US" altLang="ja-JP" b="1" dirty="0">
+              <a:solidFill>
+                <a:srgbClr val="FFFF00"/>
+              </a:solidFill>
+            </a:endParaRPr>
+          </a:p>
+          <a:p>
+            <a:r>
+              <a:rPr lang="ja-JP" altLang="en-US" b="1" dirty="0"/>
+              <a:t>・残りの</a:t>
+            </a:r>
+            <a:r>
+              <a:rPr lang="en-US" altLang="ja-JP" b="1" dirty="0"/>
+              <a:t>HP</a:t>
+            </a:r>
+            <a:r>
+              <a:rPr lang="ja-JP" altLang="en-US" b="1" dirty="0"/>
+              <a:t>が少なければ</a:t>
+            </a:r>
+            <a:r>
+              <a:rPr lang="ja-JP" altLang="en-US" b="1" dirty="0">
+                <a:solidFill>
+                  <a:srgbClr val="FFFF00"/>
+                </a:solidFill>
+              </a:rPr>
+              <a:t>プレイヤーから逃げる</a:t>
+            </a:r>
+            <a:endParaRPr lang="en-US" altLang="ja-JP" b="1" dirty="0">
+              <a:solidFill>
+                <a:srgbClr val="FFFF00"/>
+              </a:solidFill>
+            </a:endParaRPr>
+          </a:p>
+          <a:p>
+            <a:r>
+              <a:rPr lang="ja-JP" altLang="en-US" b="1" dirty="0">
+                <a:solidFill>
+                  <a:schemeClr val="bg1"/>
+                </a:solidFill>
+              </a:rPr>
+              <a:t>・強さレベルが高いほど</a:t>
+            </a:r>
+            <a:r>
+              <a:rPr lang="ja-JP" altLang="en-US" b="1" dirty="0">
+                <a:solidFill>
+                  <a:srgbClr val="FFFF00"/>
+                </a:solidFill>
+              </a:rPr>
+              <a:t>行動</a:t>
+            </a:r>
+            <a:r>
+              <a:rPr lang="ja-JP" altLang="en-US" b="1" dirty="0">
+                <a:solidFill>
+                  <a:schemeClr val="bg1"/>
+                </a:solidFill>
+              </a:rPr>
+              <a:t>の切り替えが早くなる</a:t>
+            </a:r>
+            <a:endParaRPr lang="en-US" altLang="ja-JP" b="1" dirty="0">
+              <a:solidFill>
+                <a:schemeClr val="bg1"/>
+              </a:solidFill>
+            </a:endParaRPr>
+          </a:p>
+        </p:txBody>
+      </p:sp>
+      <p:sp>
+        <p:nvSpPr>
+          <p:cNvPr id="7" name="正方形/長方形 6">
+            <a:extLst>
+              <a:ext uri="{FF2B5EF4-FFF2-40B4-BE49-F238E27FC236}">
+                <a16:creationId xmlns:a16="http://schemas.microsoft.com/office/drawing/2014/main" id="{E0A5B3E0-0B23-421A-B083-39235D2964DF}"/>
+              </a:ext>
+            </a:extLst>
+          </p:cNvPr>
+          <p:cNvSpPr/>
           <p:nvPr/>
         </p:nvSpPr>
         <p:spPr>
           <a:xfrm>
-            <a:off x="567542" y="3541060"/>
-            <a:ext cx="10939213" cy="1938992"/>
+            <a:off x="567542" y="2047426"/>
+            <a:ext cx="3487271" cy="2214282"/>
           </a:xfrm>
           <a:prstGeom prst="rect">
             <a:avLst/>
           </a:prstGeom>
-          <a:noFill/>
         </p:spPr>
-        <p:txBody>
-          <a:bodyPr wrap="none" rtlCol="0">
-            <a:spAutoFit/>
-          </a:bodyPr>
-          <a:lstStyle/>
-          <a:p>
-            <a:r>
-              <a:rPr kumimoji="1" lang="ja-JP" altLang="en-US" sz="2400" dirty="0"/>
-              <a:t>例えば、</a:t>
-            </a:r>
-            <a:endParaRPr kumimoji="1" lang="en-US" altLang="ja-JP" sz="2400" dirty="0"/>
-          </a:p>
-          <a:p>
-            <a:r>
-              <a:rPr kumimoji="1" lang="ja-JP" altLang="en-US" sz="2400" dirty="0"/>
-              <a:t>攻撃的な</a:t>
-            </a:r>
-            <a:r>
-              <a:rPr kumimoji="1" lang="en-US" altLang="ja-JP" sz="2400" dirty="0"/>
-              <a:t>AI</a:t>
-            </a:r>
-            <a:r>
-              <a:rPr kumimoji="1" lang="ja-JP" altLang="en-US" sz="2400" dirty="0"/>
-              <a:t>であれば、「近くに敵がいたら攻撃する」みたいな処理を、</a:t>
-            </a:r>
-            <a:endParaRPr lang="en-US" altLang="ja-JP" sz="2400" dirty="0"/>
-          </a:p>
-          <a:p>
-            <a:r>
-              <a:rPr kumimoji="1" lang="ja-JP" altLang="en-US" sz="2400" dirty="0"/>
-              <a:t>逃げ腰の</a:t>
-            </a:r>
-            <a:r>
-              <a:rPr kumimoji="1" lang="en-US" altLang="ja-JP" sz="2400" dirty="0"/>
-              <a:t>AI</a:t>
-            </a:r>
-            <a:r>
-              <a:rPr kumimoji="1" lang="ja-JP" altLang="en-US" sz="2400" dirty="0"/>
-              <a:t>であれば、「近くに敵がいたら逃げる」みたいな処理を</a:t>
-            </a:r>
-            <a:r>
-              <a:rPr lang="ja-JP" altLang="en-US" sz="2400" dirty="0"/>
-              <a:t>書きます。</a:t>
-            </a:r>
-            <a:endParaRPr lang="en-US" altLang="ja-JP" sz="2400" dirty="0"/>
-          </a:p>
-          <a:p>
-            <a:endParaRPr kumimoji="1" lang="en-US" altLang="ja-JP" sz="2400" dirty="0"/>
-          </a:p>
-          <a:p>
-            <a:r>
-              <a:rPr lang="ja-JP" altLang="en-US" sz="2400" dirty="0"/>
-              <a:t>次のスライドで実装します。</a:t>
-            </a:r>
-            <a:endParaRPr kumimoji="1" lang="en-US" altLang="ja-JP" sz="2400" dirty="0"/>
+        <p:style>
+          <a:lnRef idx="2">
+            <a:schemeClr val="accent4">
+              <a:shade val="50000"/>
+            </a:schemeClr>
+          </a:lnRef>
+          <a:fillRef idx="1">
+            <a:schemeClr val="accent4"/>
+          </a:fillRef>
+          <a:effectRef idx="0">
+            <a:schemeClr val="accent4"/>
+          </a:effectRef>
+          <a:fontRef idx="minor">
+            <a:schemeClr val="lt1"/>
+          </a:fontRef>
+        </p:style>
+        <p:txBody>
+          <a:bodyPr rtlCol="0" anchor="t"/>
+          <a:lstStyle/>
+          <a:p>
+            <a:r>
+              <a:rPr lang="ja-JP" altLang="en-US" b="1" dirty="0"/>
+              <a:t>行動</a:t>
+            </a:r>
+            <a:endParaRPr lang="en-US" altLang="ja-JP" b="1" dirty="0"/>
+          </a:p>
+          <a:p>
+            <a:r>
+              <a:rPr lang="ja-JP" altLang="en-US" b="1" dirty="0"/>
+              <a:t>・プレイヤーに近づく</a:t>
+            </a:r>
+            <a:endParaRPr lang="en-US" altLang="ja-JP" b="1" dirty="0"/>
+          </a:p>
+          <a:p>
+            <a:r>
+              <a:rPr lang="ja-JP" altLang="en-US" b="1" dirty="0"/>
+              <a:t>・アイテムを取りに行く</a:t>
+            </a:r>
+            <a:endParaRPr lang="en-US" altLang="ja-JP" b="1" dirty="0"/>
+          </a:p>
+          <a:p>
+            <a:r>
+              <a:rPr lang="ja-JP" altLang="en-US" b="1" dirty="0"/>
+              <a:t>・プレイヤーから逃げる</a:t>
+            </a:r>
+            <a:endParaRPr lang="en-US" altLang="ja-JP" b="1" dirty="0"/>
+          </a:p>
+          <a:p>
+            <a:r>
+              <a:rPr lang="ja-JP" altLang="en-US" b="1" dirty="0"/>
+              <a:t>・攻撃する</a:t>
+            </a:r>
+            <a:endParaRPr lang="en-US" altLang="ja-JP" b="1" dirty="0"/>
+          </a:p>
+        </p:txBody>
+      </p:sp>
+      <p:sp>
+        <p:nvSpPr>
+          <p:cNvPr id="8" name="正方形/長方形 7">
+            <a:extLst>
+              <a:ext uri="{FF2B5EF4-FFF2-40B4-BE49-F238E27FC236}">
+                <a16:creationId xmlns:a16="http://schemas.microsoft.com/office/drawing/2014/main" id="{FE48F063-C498-4BEE-8ECD-2FB2CD69FC96}"/>
+              </a:ext>
+            </a:extLst>
+          </p:cNvPr>
+          <p:cNvSpPr/>
+          <p:nvPr/>
+        </p:nvSpPr>
+        <p:spPr>
+          <a:xfrm>
+            <a:off x="4565801" y="4512720"/>
+            <a:ext cx="6400801" cy="2214282"/>
+          </a:xfrm>
+          <a:prstGeom prst="rect">
+            <a:avLst/>
+          </a:prstGeom>
+        </p:spPr>
+        <p:style>
+          <a:lnRef idx="2">
+            <a:schemeClr val="accent1">
+              <a:shade val="50000"/>
+            </a:schemeClr>
+          </a:lnRef>
+          <a:fillRef idx="1">
+            <a:schemeClr val="accent1"/>
+          </a:fillRef>
+          <a:effectRef idx="0">
+            <a:schemeClr val="accent1"/>
+          </a:effectRef>
+          <a:fontRef idx="minor">
+            <a:schemeClr val="lt1"/>
+          </a:fontRef>
+        </p:style>
+        <p:txBody>
+          <a:bodyPr rtlCol="0" anchor="t"/>
+          <a:lstStyle/>
+          <a:p>
+            <a:r>
+              <a:rPr lang="ja-JP" altLang="en-US" b="1" dirty="0"/>
+              <a:t>戦略</a:t>
+            </a:r>
+            <a:r>
+              <a:rPr lang="en-US" altLang="ja-JP" b="1" dirty="0"/>
+              <a:t>B</a:t>
+            </a:r>
+          </a:p>
+          <a:p>
+            <a:endParaRPr lang="en-US" altLang="ja-JP" b="1" dirty="0"/>
+          </a:p>
+          <a:p>
+            <a:r>
+              <a:rPr lang="ja-JP" altLang="en-US" b="1" dirty="0"/>
+              <a:t>・５秒ごとに</a:t>
+            </a:r>
+            <a:r>
+              <a:rPr lang="ja-JP" altLang="en-US" b="1" dirty="0">
+                <a:solidFill>
+                  <a:srgbClr val="FFFF00"/>
+                </a:solidFill>
+              </a:rPr>
+              <a:t>行動</a:t>
+            </a:r>
+            <a:r>
+              <a:rPr lang="ja-JP" altLang="en-US" b="1" dirty="0"/>
+              <a:t>の中からランダムな行動をとる</a:t>
+            </a:r>
+            <a:endParaRPr lang="en-US" altLang="ja-JP" b="1" dirty="0"/>
+          </a:p>
+          <a:p>
+            <a:r>
+              <a:rPr lang="ja-JP" altLang="en-US" b="1" dirty="0">
+                <a:solidFill>
+                  <a:schemeClr val="bg1"/>
+                </a:solidFill>
+              </a:rPr>
+              <a:t>・強さレベルが高いほど</a:t>
+            </a:r>
+            <a:r>
+              <a:rPr lang="ja-JP" altLang="en-US" b="1" dirty="0">
+                <a:solidFill>
+                  <a:srgbClr val="FFFF00"/>
+                </a:solidFill>
+              </a:rPr>
+              <a:t>攻撃する行動</a:t>
+            </a:r>
+            <a:r>
+              <a:rPr lang="ja-JP" altLang="en-US" b="1" dirty="0">
+                <a:solidFill>
+                  <a:schemeClr val="bg1"/>
+                </a:solidFill>
+              </a:rPr>
+              <a:t>を選びやすくなる</a:t>
+            </a:r>
+            <a:endParaRPr lang="en-US" altLang="ja-JP" b="1" dirty="0">
+              <a:solidFill>
+                <a:schemeClr val="bg1"/>
+              </a:solidFill>
+            </a:endParaRPr>
+          </a:p>
+          <a:p>
+            <a:endParaRPr lang="en-US" altLang="ja-JP" b="1" dirty="0"/>
           </a:p>
         </p:txBody>
       </p:sp>
     </p:spTree>
     <p:extLst>
       <p:ext uri="{BB962C8B-B14F-4D97-AF65-F5344CB8AC3E}">
-        <p14:creationId xmlns:p14="http://schemas.microsoft.com/office/powerpoint/2010/main" val="4253703638"/>
+        <p14:creationId xmlns:p14="http://schemas.microsoft.com/office/powerpoint/2010/main" val="38792862"/>
       </p:ext>
     </p:extLst>
   </p:cSld>
@@ -4041,7 +4130,7 @@
         <p:spPr>
           <a:xfrm>
             <a:off x="567542" y="491954"/>
-            <a:ext cx="5522666" cy="584775"/>
+            <a:ext cx="1826141" cy="584775"/>
           </a:xfrm>
           <a:prstGeom prst="rect">
             <a:avLst/>
@@ -4055,12 +4144,8 @@
           <a:lstStyle/>
           <a:p>
             <a:r>
-              <a:rPr kumimoji="1" lang="en-US" altLang="ja-JP" sz="3200" b="1" u="sng" dirty="0"/>
-              <a:t>AI</a:t>
-            </a:r>
-            <a:r>
               <a:rPr kumimoji="1" lang="ja-JP" altLang="en-US" sz="3200" b="1" u="sng" dirty="0"/>
-              <a:t>管理とストラテジークラス</a:t>
+              <a:t>行動処理</a:t>
             </a:r>
             <a:endParaRPr kumimoji="1" lang="en-US" altLang="ja-JP" sz="3200" b="1" u="sng" dirty="0"/>
           </a:p>
@@ -4081,7 +4166,7 @@
         <p:spPr>
           <a:xfrm>
             <a:off x="567542" y="1216429"/>
-            <a:ext cx="6160661" cy="830997"/>
+            <a:ext cx="7879080" cy="1200329"/>
           </a:xfrm>
           <a:prstGeom prst="rect">
             <a:avLst/>
@@ -4095,90 +4180,120 @@
           <a:lstStyle/>
           <a:p>
             <a:r>
-              <a:rPr kumimoji="1" lang="en-US" altLang="ja-JP" sz="2400" b="1" dirty="0">
+              <a:rPr kumimoji="1" lang="ja-JP" altLang="en-US" sz="2400" dirty="0"/>
+              <a:t>今回は行動について学習します。</a:t>
+            </a:r>
+            <a:endParaRPr kumimoji="1" lang="en-US" altLang="ja-JP" sz="2400" dirty="0"/>
+          </a:p>
+          <a:p>
+            <a:r>
+              <a:rPr lang="ja-JP" altLang="en-US" sz="2400" dirty="0"/>
+              <a:t>プログラムは既に組まれているので確認していきます。</a:t>
+            </a:r>
+            <a:endParaRPr lang="en-US" altLang="ja-JP" sz="2400" dirty="0"/>
+          </a:p>
+          <a:p>
+            <a:r>
+              <a:rPr kumimoji="1" lang="ja-JP" altLang="en-US" sz="2400" dirty="0"/>
+              <a:t>前回の</a:t>
+            </a:r>
+            <a:r>
+              <a:rPr kumimoji="1" lang="en-US" altLang="ja-JP" sz="2400" b="1" dirty="0" err="1">
                 <a:solidFill>
-                  <a:srgbClr val="FF0000"/>
+                  <a:srgbClr val="00B050"/>
                 </a:solidFill>
               </a:rPr>
-              <a:t>Source</a:t>
-            </a:r>
-            <a:r>
-              <a:rPr kumimoji="1" lang="ja-JP" altLang="en-US" sz="2400" b="1" dirty="0">
-                <a:solidFill>
-                  <a:srgbClr val="FF0000"/>
-                </a:solidFill>
-              </a:rPr>
-              <a:t>フォルダ</a:t>
+              <a:t>AIStrategy</a:t>
             </a:r>
             <a:r>
               <a:rPr kumimoji="1" lang="ja-JP" altLang="en-US" sz="2400" dirty="0"/>
-              <a:t>に</a:t>
-            </a:r>
-            <a:r>
-              <a:rPr kumimoji="1" lang="en-US" altLang="ja-JP" sz="2400" b="1" dirty="0">
-                <a:solidFill>
-                  <a:srgbClr val="FF0000"/>
-                </a:solidFill>
-              </a:rPr>
-              <a:t>AI</a:t>
-            </a:r>
-            <a:r>
-              <a:rPr kumimoji="1" lang="ja-JP" altLang="en-US" sz="2400" b="1" dirty="0">
-                <a:solidFill>
-                  <a:srgbClr val="FF0000"/>
-                </a:solidFill>
-              </a:rPr>
-              <a:t>フォルダ</a:t>
-            </a:r>
-            <a:r>
-              <a:rPr kumimoji="1" lang="ja-JP" altLang="en-US" sz="2400" dirty="0"/>
-              <a:t>を追加して、</a:t>
-            </a:r>
-            <a:endParaRPr lang="en-US" altLang="ja-JP" sz="2400" dirty="0"/>
-          </a:p>
-          <a:p>
-            <a:r>
-              <a:rPr lang="ja-JP" altLang="en-US" sz="2400" dirty="0"/>
-              <a:t>中に以下のファイルを追加しましょう。</a:t>
+              <a:t>については一旦保留します。</a:t>
             </a:r>
             <a:endParaRPr kumimoji="1" lang="en-US" altLang="ja-JP" sz="2400" dirty="0"/>
           </a:p>
         </p:txBody>
       </p:sp>
-      <p:pic>
-        <p:nvPicPr>
-          <p:cNvPr id="3" name="図 2">
-            <a:extLst>
-              <a:ext uri="{FF2B5EF4-FFF2-40B4-BE49-F238E27FC236}">
-                <a16:creationId xmlns:a16="http://schemas.microsoft.com/office/drawing/2014/main" id="{C2654E4D-F315-461B-872E-093B3E6DB25D}"/>
-              </a:ext>
-            </a:extLst>
-          </p:cNvPr>
-          <p:cNvPicPr>
-            <a:picLocks noChangeAspect="1"/>
-          </p:cNvPicPr>
+      <p:sp>
+        <p:nvSpPr>
+          <p:cNvPr id="7" name="正方形/長方形 6">
+            <a:extLst>
+              <a:ext uri="{FF2B5EF4-FFF2-40B4-BE49-F238E27FC236}">
+                <a16:creationId xmlns:a16="http://schemas.microsoft.com/office/drawing/2014/main" id="{E0A5B3E0-0B23-421A-B083-39235D2964DF}"/>
+              </a:ext>
+            </a:extLst>
+          </p:cNvPr>
+          <p:cNvSpPr/>
           <p:nvPr/>
-        </p:nvPicPr>
-        <p:blipFill>
-          <a:blip r:embed="rId2"/>
-          <a:stretch>
-            <a:fillRect/>
-          </a:stretch>
-        </p:blipFill>
+        </p:nvSpPr>
         <p:spPr>
           <a:xfrm>
-            <a:off x="567542" y="2187126"/>
-            <a:ext cx="5560174" cy="3962662"/>
+            <a:off x="4198248" y="3194908"/>
+            <a:ext cx="3487271" cy="2214282"/>
           </a:xfrm>
           <a:prstGeom prst="rect">
             <a:avLst/>
           </a:prstGeom>
         </p:spPr>
-      </p:pic>
+        <p:style>
+          <a:lnRef idx="2">
+            <a:schemeClr val="accent4">
+              <a:shade val="50000"/>
+            </a:schemeClr>
+          </a:lnRef>
+          <a:fillRef idx="1">
+            <a:schemeClr val="accent4"/>
+          </a:fillRef>
+          <a:effectRef idx="0">
+            <a:schemeClr val="accent4"/>
+          </a:effectRef>
+          <a:fontRef idx="minor">
+            <a:schemeClr val="lt1"/>
+          </a:fontRef>
+        </p:style>
+        <p:txBody>
+          <a:bodyPr rtlCol="0" anchor="t"/>
+          <a:lstStyle/>
+          <a:p>
+            <a:r>
+              <a:rPr lang="ja-JP" altLang="en-US" b="1" dirty="0"/>
+              <a:t>行動</a:t>
+            </a:r>
+            <a:endParaRPr lang="en-US" altLang="ja-JP" b="1" dirty="0"/>
+          </a:p>
+          <a:p>
+            <a:r>
+              <a:rPr lang="ja-JP" altLang="en-US" b="1" dirty="0"/>
+              <a:t>・プレイヤーに近づく</a:t>
+            </a:r>
+            <a:endParaRPr lang="en-US" altLang="ja-JP" b="1" dirty="0"/>
+          </a:p>
+          <a:p>
+            <a:r>
+              <a:rPr lang="ja-JP" altLang="en-US" b="1" dirty="0"/>
+              <a:t>・アイテムを取りに行く</a:t>
+            </a:r>
+            <a:endParaRPr lang="en-US" altLang="ja-JP" b="1" dirty="0"/>
+          </a:p>
+          <a:p>
+            <a:r>
+              <a:rPr lang="ja-JP" altLang="en-US" b="1" dirty="0"/>
+              <a:t>・プレイヤーから逃げる</a:t>
+            </a:r>
+            <a:endParaRPr lang="en-US" altLang="ja-JP" b="1" dirty="0"/>
+          </a:p>
+          <a:p>
+            <a:r>
+              <a:rPr lang="ja-JP" altLang="en-US" b="1" dirty="0"/>
+              <a:t>・攻撃する</a:t>
+            </a:r>
+            <a:endParaRPr lang="en-US" altLang="ja-JP" b="1" dirty="0"/>
+          </a:p>
+        </p:txBody>
+      </p:sp>
     </p:spTree>
     <p:extLst>
       <p:ext uri="{BB962C8B-B14F-4D97-AF65-F5344CB8AC3E}">
-        <p14:creationId xmlns:p14="http://schemas.microsoft.com/office/powerpoint/2010/main" val="2170103340"/>
+        <p14:creationId xmlns:p14="http://schemas.microsoft.com/office/powerpoint/2010/main" val="3224325491"/>
       </p:ext>
     </p:extLst>
   </p:cSld>
@@ -4220,7 +4335,7 @@
         <p:spPr>
           <a:xfrm>
             <a:off x="567542" y="491954"/>
-            <a:ext cx="1418978" cy="584775"/>
+            <a:ext cx="2763898" cy="584775"/>
           </a:xfrm>
           <a:prstGeom prst="rect">
             <a:avLst/>
@@ -4234,12 +4349,8 @@
           <a:lstStyle/>
           <a:p>
             <a:r>
-              <a:rPr kumimoji="1" lang="en-US" altLang="ja-JP" sz="3200" b="1" u="sng" dirty="0"/>
-              <a:t>AI</a:t>
-            </a:r>
-            <a:r>
               <a:rPr kumimoji="1" lang="ja-JP" altLang="en-US" sz="3200" b="1" u="sng" dirty="0"/>
-              <a:t>管理</a:t>
+              <a:t>行動処理 補足</a:t>
             </a:r>
             <a:endParaRPr kumimoji="1" lang="en-US" altLang="ja-JP" sz="3200" b="1" u="sng" dirty="0"/>
           </a:p>
@@ -4260,7 +4371,7 @@
         <p:spPr>
           <a:xfrm>
             <a:off x="567542" y="1216429"/>
-            <a:ext cx="5790368" cy="461665"/>
+            <a:ext cx="4488729" cy="461665"/>
           </a:xfrm>
           <a:prstGeom prst="rect">
             <a:avLst/>
@@ -4279,11 +4390,11 @@
                   <a:srgbClr val="FF0000"/>
                 </a:solidFill>
               </a:rPr>
-              <a:t>AIManager.h</a:t>
+              <a:t>AIPlayer.h</a:t>
             </a:r>
             <a:r>
               <a:rPr kumimoji="1" lang="ja-JP" altLang="en-US" sz="2400" dirty="0"/>
-              <a:t>で管理クラスを書きます。</a:t>
+              <a:t>を確認しましょう。</a:t>
             </a:r>
             <a:endParaRPr kumimoji="1" lang="en-US" altLang="ja-JP" sz="2400" dirty="0"/>
           </a:p>
@@ -4291,10 +4402,10 @@
       </p:sp>
       <p:pic>
         <p:nvPicPr>
-          <p:cNvPr id="5" name="図 4">
-            <a:extLst>
-              <a:ext uri="{FF2B5EF4-FFF2-40B4-BE49-F238E27FC236}">
-                <a16:creationId xmlns:a16="http://schemas.microsoft.com/office/drawing/2014/main" id="{9576F2D3-AE74-4B82-AEF9-50C27F5B4BAF}"/>
+          <p:cNvPr id="10" name="図 9">
+            <a:extLst>
+              <a:ext uri="{FF2B5EF4-FFF2-40B4-BE49-F238E27FC236}">
+                <a16:creationId xmlns:a16="http://schemas.microsoft.com/office/drawing/2014/main" id="{4B8FDBD6-B69D-4EF6-9614-D9DCBE04D96C}"/>
               </a:ext>
             </a:extLst>
           </p:cNvPr>
@@ -4311,8 +4422,8 @@
         </p:blipFill>
         <p:spPr>
           <a:xfrm>
-            <a:off x="567542" y="1817795"/>
-            <a:ext cx="4786900" cy="4816088"/>
+            <a:off x="567542" y="1817794"/>
+            <a:ext cx="8558529" cy="4600209"/>
           </a:xfrm>
           <a:prstGeom prst="rect">
             <a:avLst/>
@@ -4322,7 +4433,7 @@
     </p:spTree>
     <p:extLst>
       <p:ext uri="{BB962C8B-B14F-4D97-AF65-F5344CB8AC3E}">
-        <p14:creationId xmlns:p14="http://schemas.microsoft.com/office/powerpoint/2010/main" val="2189175894"/>
+        <p14:creationId xmlns:p14="http://schemas.microsoft.com/office/powerpoint/2010/main" val="2344918512"/>
       </p:ext>
     </p:extLst>
   </p:cSld>
@@ -4364,7 +4475,7 @@
         <p:spPr>
           <a:xfrm>
             <a:off x="567542" y="491954"/>
-            <a:ext cx="1418978" cy="584775"/>
+            <a:ext cx="2763898" cy="584775"/>
           </a:xfrm>
           <a:prstGeom prst="rect">
             <a:avLst/>
@@ -4378,12 +4489,8 @@
           <a:lstStyle/>
           <a:p>
             <a:r>
-              <a:rPr kumimoji="1" lang="en-US" altLang="ja-JP" sz="3200" b="1" u="sng" dirty="0"/>
-              <a:t>AI</a:t>
-            </a:r>
-            <a:r>
               <a:rPr kumimoji="1" lang="ja-JP" altLang="en-US" sz="3200" b="1" u="sng" dirty="0"/>
-              <a:t>管理</a:t>
+              <a:t>行動処理 補足</a:t>
             </a:r>
             <a:endParaRPr kumimoji="1" lang="en-US" altLang="ja-JP" sz="3200" b="1" u="sng" dirty="0"/>
           </a:p>
@@ -4404,7 +4511,7 @@
         <p:spPr>
           <a:xfrm>
             <a:off x="567542" y="1216429"/>
-            <a:ext cx="4301177" cy="461665"/>
+            <a:ext cx="11290270" cy="1200329"/>
           </a:xfrm>
           <a:prstGeom prst="rect">
             <a:avLst/>
@@ -4418,16 +4525,58 @@
           <a:lstStyle/>
           <a:p>
             <a:r>
-              <a:rPr kumimoji="1" lang="en-US" altLang="ja-JP" sz="2400" b="1" dirty="0">
+              <a:rPr kumimoji="1" lang="en-US" altLang="ja-JP" sz="2400" b="1" dirty="0" err="1">
+                <a:solidFill>
+                  <a:srgbClr val="00B050"/>
+                </a:solidFill>
+              </a:rPr>
+              <a:t>AIPlayer</a:t>
+            </a:r>
+            <a:r>
+              <a:rPr kumimoji="1" lang="ja-JP" altLang="en-US" sz="2400" b="1" dirty="0">
+                <a:solidFill>
+                  <a:srgbClr val="00B050"/>
+                </a:solidFill>
+              </a:rPr>
+              <a:t>クラス</a:t>
+            </a:r>
+            <a:r>
+              <a:rPr kumimoji="1" lang="ja-JP" altLang="en-US" sz="2400" dirty="0"/>
+              <a:t>には</a:t>
+            </a:r>
+            <a:r>
+              <a:rPr kumimoji="1" lang="ja-JP" altLang="en-US" sz="2400" b="1" dirty="0">
+                <a:solidFill>
+                  <a:srgbClr val="00B050"/>
+                </a:solidFill>
+              </a:rPr>
+              <a:t>戦略クラス</a:t>
+            </a:r>
+            <a:r>
+              <a:rPr kumimoji="1" lang="ja-JP" altLang="en-US" sz="2400" dirty="0"/>
+              <a:t>が導いた戦略に合わせた行動が書かれています。</a:t>
+            </a:r>
+            <a:endParaRPr kumimoji="1" lang="en-US" altLang="ja-JP" sz="2400" dirty="0"/>
+          </a:p>
+          <a:p>
+            <a:r>
+              <a:rPr lang="ja-JP" altLang="en-US" sz="2400" dirty="0"/>
+              <a:t>つまり、</a:t>
+            </a:r>
+            <a:endParaRPr lang="en-US" altLang="ja-JP" sz="2400" dirty="0"/>
+          </a:p>
+          <a:p>
+            <a:r>
+              <a:rPr kumimoji="1" lang="ja-JP" altLang="en-US" sz="2400" b="1" dirty="0">
                 <a:solidFill>
                   <a:srgbClr val="FF0000"/>
                 </a:solidFill>
               </a:rPr>
-              <a:t>AIManager.cpp</a:t>
+              <a:t>戦略を決めるクラスと、実際に行動するクラスは別々</a:t>
             </a:r>
             <a:r>
               <a:rPr kumimoji="1" lang="ja-JP" altLang="en-US" sz="2400" dirty="0"/>
-              <a:t>を書きます。</a:t>
+              <a:t>に作られています。</a:t>
             </a:r>
             <a:endParaRPr kumimoji="1" lang="en-US" altLang="ja-JP" sz="2400" dirty="0"/>
           </a:p>
@@ -4438,7 +4587,7 @@
           <p:cNvPr id="3" name="図 2">
             <a:extLst>
               <a:ext uri="{FF2B5EF4-FFF2-40B4-BE49-F238E27FC236}">
-                <a16:creationId xmlns:a16="http://schemas.microsoft.com/office/drawing/2014/main" id="{4F595E71-D15D-4961-988A-76E7D67214E1}"/>
+                <a16:creationId xmlns:a16="http://schemas.microsoft.com/office/drawing/2014/main" id="{31D8AEBD-3C4C-474D-9067-87D150CD0FC5}"/>
               </a:ext>
             </a:extLst>
           </p:cNvPr>
@@ -4455,18 +4604,295 @@
         </p:blipFill>
         <p:spPr>
           <a:xfrm>
-            <a:off x="567542" y="1817794"/>
-            <a:ext cx="4434764" cy="4780066"/>
+            <a:off x="567542" y="2556458"/>
+            <a:ext cx="4963218" cy="1057423"/>
           </a:xfrm>
           <a:prstGeom prst="rect">
             <a:avLst/>
           </a:prstGeom>
         </p:spPr>
       </p:pic>
+      <p:grpSp>
+        <p:nvGrpSpPr>
+          <p:cNvPr id="13" name="グループ化 12">
+            <a:extLst>
+              <a:ext uri="{FF2B5EF4-FFF2-40B4-BE49-F238E27FC236}">
+                <a16:creationId xmlns:a16="http://schemas.microsoft.com/office/drawing/2014/main" id="{EBAC2085-2851-4057-AE00-D6BEA81F303A}"/>
+              </a:ext>
+            </a:extLst>
+          </p:cNvPr>
+          <p:cNvGrpSpPr/>
+          <p:nvPr/>
+        </p:nvGrpSpPr>
+        <p:grpSpPr>
+          <a:xfrm>
+            <a:off x="5008504" y="2680823"/>
+            <a:ext cx="5814660" cy="3930631"/>
+            <a:chOff x="4847140" y="2779434"/>
+            <a:chExt cx="5814660" cy="3930631"/>
+          </a:xfrm>
+        </p:grpSpPr>
+        <p:sp>
+          <p:nvSpPr>
+            <p:cNvPr id="5" name="思考の吹き出し: 雲形 4">
+              <a:extLst>
+                <a:ext uri="{FF2B5EF4-FFF2-40B4-BE49-F238E27FC236}">
+                  <a16:creationId xmlns:a16="http://schemas.microsoft.com/office/drawing/2014/main" id="{4597EFB3-65D0-4FED-BF6C-6242896F45AE}"/>
+                </a:ext>
+              </a:extLst>
+            </p:cNvPr>
+            <p:cNvSpPr/>
+            <p:nvPr/>
+          </p:nvSpPr>
+          <p:spPr>
+            <a:xfrm>
+              <a:off x="7533118" y="2779434"/>
+              <a:ext cx="3128682" cy="2052918"/>
+            </a:xfrm>
+            <a:prstGeom prst="cloudCallout">
+              <a:avLst/>
+            </a:prstGeom>
+          </p:spPr>
+          <p:style>
+            <a:lnRef idx="2">
+              <a:schemeClr val="accent6">
+                <a:shade val="50000"/>
+              </a:schemeClr>
+            </a:lnRef>
+            <a:fillRef idx="1">
+              <a:schemeClr val="accent6"/>
+            </a:fillRef>
+            <a:effectRef idx="0">
+              <a:schemeClr val="accent6"/>
+            </a:effectRef>
+            <a:fontRef idx="minor">
+              <a:schemeClr val="lt1"/>
+            </a:fontRef>
+          </p:style>
+          <p:txBody>
+            <a:bodyPr rtlCol="0" anchor="ctr"/>
+            <a:lstStyle/>
+            <a:p>
+              <a:pPr algn="ctr"/>
+              <a:r>
+                <a:rPr kumimoji="1" lang="en-US" altLang="ja-JP" b="1" dirty="0" err="1"/>
+                <a:t>AIStrategy</a:t>
+              </a:r>
+              <a:endParaRPr kumimoji="1" lang="en-US" altLang="ja-JP" b="1" dirty="0"/>
+            </a:p>
+            <a:p>
+              <a:pPr algn="ctr"/>
+              <a:r>
+                <a:rPr kumimoji="1" lang="ja-JP" altLang="en-US" b="1" dirty="0"/>
+                <a:t>攻撃しろ！！</a:t>
+              </a:r>
+              <a:endParaRPr kumimoji="1" lang="en-US" altLang="ja-JP" b="1" dirty="0"/>
+            </a:p>
+          </p:txBody>
+        </p:sp>
+        <p:sp>
+          <p:nvSpPr>
+            <p:cNvPr id="7" name="スマイル 6">
+              <a:extLst>
+                <a:ext uri="{FF2B5EF4-FFF2-40B4-BE49-F238E27FC236}">
+                  <a16:creationId xmlns:a16="http://schemas.microsoft.com/office/drawing/2014/main" id="{08EEAF3F-6E85-4726-B142-C9D33BB3487F}"/>
+                </a:ext>
+              </a:extLst>
+            </p:cNvPr>
+            <p:cNvSpPr/>
+            <p:nvPr/>
+          </p:nvSpPr>
+          <p:spPr>
+            <a:xfrm>
+              <a:off x="6920752" y="4706470"/>
+              <a:ext cx="1667436" cy="1541930"/>
+            </a:xfrm>
+            <a:prstGeom prst="smileyFace">
+              <a:avLst/>
+            </a:prstGeom>
+            <a:solidFill>
+              <a:srgbClr val="FFFF00"/>
+            </a:solidFill>
+            <a:ln>
+              <a:solidFill>
+                <a:schemeClr val="tx1"/>
+              </a:solidFill>
+            </a:ln>
+          </p:spPr>
+          <p:style>
+            <a:lnRef idx="2">
+              <a:schemeClr val="accent1">
+                <a:shade val="50000"/>
+              </a:schemeClr>
+            </a:lnRef>
+            <a:fillRef idx="1">
+              <a:schemeClr val="accent1"/>
+            </a:fillRef>
+            <a:effectRef idx="0">
+              <a:schemeClr val="accent1"/>
+            </a:effectRef>
+            <a:fontRef idx="minor">
+              <a:schemeClr val="lt1"/>
+            </a:fontRef>
+          </p:style>
+          <p:txBody>
+            <a:bodyPr rtlCol="0" anchor="ctr"/>
+            <a:lstStyle/>
+            <a:p>
+              <a:pPr algn="ctr"/>
+              <a:endParaRPr kumimoji="1" lang="ja-JP" altLang="en-US" b="1" dirty="0">
+                <a:solidFill>
+                  <a:srgbClr val="FF0000"/>
+                </a:solidFill>
+              </a:endParaRPr>
+            </a:p>
+          </p:txBody>
+        </p:sp>
+        <p:sp>
+          <p:nvSpPr>
+            <p:cNvPr id="12" name="テキスト ボックス 11">
+              <a:extLst>
+                <a:ext uri="{FF2B5EF4-FFF2-40B4-BE49-F238E27FC236}">
+                  <a16:creationId xmlns:a16="http://schemas.microsoft.com/office/drawing/2014/main" id="{3E5206D1-44A4-444E-B27F-84F56A38E35A}"/>
+                </a:ext>
+              </a:extLst>
+            </p:cNvPr>
+            <p:cNvSpPr txBox="1"/>
+            <p:nvPr/>
+          </p:nvSpPr>
+          <p:spPr>
+            <a:xfrm>
+              <a:off x="7046584" y="6248400"/>
+              <a:ext cx="1441420" cy="461665"/>
+            </a:xfrm>
+            <a:prstGeom prst="rect">
+              <a:avLst/>
+            </a:prstGeom>
+            <a:noFill/>
+          </p:spPr>
+          <p:txBody>
+            <a:bodyPr wrap="none" rtlCol="0">
+              <a:spAutoFit/>
+            </a:bodyPr>
+            <a:lstStyle/>
+            <a:p>
+              <a:r>
+                <a:rPr lang="en-US" altLang="ja-JP" sz="2400" b="1" dirty="0" err="1">
+                  <a:solidFill>
+                    <a:srgbClr val="00B050"/>
+                  </a:solidFill>
+                </a:rPr>
+                <a:t>AIPlayer</a:t>
+              </a:r>
+              <a:endParaRPr kumimoji="1" lang="en-US" altLang="ja-JP" sz="2400" b="1" dirty="0">
+                <a:solidFill>
+                  <a:srgbClr val="00B050"/>
+                </a:solidFill>
+              </a:endParaRPr>
+            </a:p>
+          </p:txBody>
+        </p:sp>
+        <p:sp>
+          <p:nvSpPr>
+            <p:cNvPr id="9" name="吹き出し: 角を丸めた四角形 8">
+              <a:extLst>
+                <a:ext uri="{FF2B5EF4-FFF2-40B4-BE49-F238E27FC236}">
+                  <a16:creationId xmlns:a16="http://schemas.microsoft.com/office/drawing/2014/main" id="{02E77E86-44CB-46BF-BF42-E9773C00AD51}"/>
+                </a:ext>
+              </a:extLst>
+            </p:cNvPr>
+            <p:cNvSpPr/>
+            <p:nvPr/>
+          </p:nvSpPr>
+          <p:spPr>
+            <a:xfrm>
+              <a:off x="4847140" y="4706470"/>
+              <a:ext cx="1667436" cy="612648"/>
+            </a:xfrm>
+            <a:prstGeom prst="wedgeRoundRectCallout">
+              <a:avLst>
+                <a:gd name="adj1" fmla="val 64461"/>
+                <a:gd name="adj2" fmla="val 84449"/>
+                <a:gd name="adj3" fmla="val 16667"/>
+              </a:avLst>
+            </a:prstGeom>
+          </p:spPr>
+          <p:style>
+            <a:lnRef idx="2">
+              <a:schemeClr val="accent1">
+                <a:shade val="50000"/>
+              </a:schemeClr>
+            </a:lnRef>
+            <a:fillRef idx="1">
+              <a:schemeClr val="accent1"/>
+            </a:fillRef>
+            <a:effectRef idx="0">
+              <a:schemeClr val="accent1"/>
+            </a:effectRef>
+            <a:fontRef idx="minor">
+              <a:schemeClr val="lt1"/>
+            </a:fontRef>
+          </p:style>
+          <p:txBody>
+            <a:bodyPr rtlCol="0" anchor="ctr"/>
+            <a:lstStyle/>
+            <a:p>
+              <a:pPr algn="ctr"/>
+              <a:r>
+                <a:rPr kumimoji="1" lang="ja-JP" altLang="en-US" b="1" dirty="0"/>
+                <a:t>攻撃します！</a:t>
+              </a:r>
+            </a:p>
+          </p:txBody>
+        </p:sp>
+      </p:grpSp>
+      <p:sp>
+        <p:nvSpPr>
+          <p:cNvPr id="14" name="テキスト ボックス 13">
+            <a:extLst>
+              <a:ext uri="{FF2B5EF4-FFF2-40B4-BE49-F238E27FC236}">
+                <a16:creationId xmlns:a16="http://schemas.microsoft.com/office/drawing/2014/main" id="{B79A5A65-9B5F-42B0-84B7-0FE7FE711722}"/>
+              </a:ext>
+            </a:extLst>
+          </p:cNvPr>
+          <p:cNvSpPr txBox="1"/>
+          <p:nvPr/>
+        </p:nvSpPr>
+        <p:spPr>
+          <a:xfrm>
+            <a:off x="559728" y="3689352"/>
+            <a:ext cx="4108817" cy="646331"/>
+          </a:xfrm>
+          <a:prstGeom prst="rect">
+            <a:avLst/>
+          </a:prstGeom>
+          <a:noFill/>
+        </p:spPr>
+        <p:txBody>
+          <a:bodyPr wrap="none" rtlCol="0">
+            <a:spAutoFit/>
+          </a:bodyPr>
+          <a:lstStyle/>
+          <a:p>
+            <a:r>
+              <a:rPr kumimoji="1" lang="ja-JP" altLang="en-US" dirty="0"/>
+              <a:t>これらの関数でゲームに干渉します。</a:t>
+            </a:r>
+            <a:endParaRPr kumimoji="1" lang="en-US" altLang="ja-JP" dirty="0"/>
+          </a:p>
+          <a:p>
+            <a:r>
+              <a:rPr kumimoji="1" lang="ja-JP" altLang="en-US" dirty="0"/>
+              <a:t>処理も見てみましょう。</a:t>
+            </a:r>
+            <a:endParaRPr kumimoji="1" lang="en-US" altLang="ja-JP" dirty="0"/>
+          </a:p>
+        </p:txBody>
+      </p:sp>
     </p:spTree>
     <p:extLst>
       <p:ext uri="{BB962C8B-B14F-4D97-AF65-F5344CB8AC3E}">
-        <p14:creationId xmlns:p14="http://schemas.microsoft.com/office/powerpoint/2010/main" val="1753701412"/>
+        <p14:creationId xmlns:p14="http://schemas.microsoft.com/office/powerpoint/2010/main" val="2333095661"/>
       </p:ext>
     </p:extLst>
   </p:cSld>
@@ -4493,6 +4919,36 @@
           <a:chExt cx="0" cy="0"/>
         </a:xfrm>
       </p:grpSpPr>
+      <p:pic>
+        <p:nvPicPr>
+          <p:cNvPr id="8" name="図 7">
+            <a:extLst>
+              <a:ext uri="{FF2B5EF4-FFF2-40B4-BE49-F238E27FC236}">
+                <a16:creationId xmlns:a16="http://schemas.microsoft.com/office/drawing/2014/main" id="{985A87DF-4A9E-46EF-AA4C-191B65DE3026}"/>
+              </a:ext>
+            </a:extLst>
+          </p:cNvPr>
+          <p:cNvPicPr>
+            <a:picLocks noChangeAspect="1"/>
+          </p:cNvPicPr>
+          <p:nvPr/>
+        </p:nvPicPr>
+        <p:blipFill>
+          <a:blip r:embed="rId2"/>
+          <a:stretch>
+            <a:fillRect/>
+          </a:stretch>
+        </p:blipFill>
+        <p:spPr>
+          <a:xfrm>
+            <a:off x="567542" y="2556458"/>
+            <a:ext cx="4915586" cy="1209844"/>
+          </a:xfrm>
+          <a:prstGeom prst="rect">
+            <a:avLst/>
+          </a:prstGeom>
+        </p:spPr>
+      </p:pic>
       <p:sp>
         <p:nvSpPr>
           <p:cNvPr id="4" name="テキスト ボックス 3">
@@ -4508,7 +4964,7 @@
         <p:spPr>
           <a:xfrm>
             <a:off x="567542" y="491954"/>
-            <a:ext cx="1418978" cy="584775"/>
+            <a:ext cx="2763898" cy="584775"/>
           </a:xfrm>
           <a:prstGeom prst="rect">
             <a:avLst/>
@@ -4522,12 +4978,8 @@
           <a:lstStyle/>
           <a:p>
             <a:r>
-              <a:rPr kumimoji="1" lang="en-US" altLang="ja-JP" sz="3200" b="1" u="sng" dirty="0"/>
-              <a:t>AI</a:t>
-            </a:r>
-            <a:r>
               <a:rPr kumimoji="1" lang="ja-JP" altLang="en-US" sz="3200" b="1" u="sng" dirty="0"/>
-              <a:t>管理</a:t>
+              <a:t>行動処理 補足</a:t>
             </a:r>
             <a:endParaRPr kumimoji="1" lang="en-US" altLang="ja-JP" sz="3200" b="1" u="sng" dirty="0"/>
           </a:p>
@@ -4548,7 +5000,7 @@
         <p:spPr>
           <a:xfrm>
             <a:off x="567542" y="1216429"/>
-            <a:ext cx="7571303" cy="1569660"/>
+            <a:ext cx="8494633" cy="1200329"/>
           </a:xfrm>
           <a:prstGeom prst="rect">
             <a:avLst/>
@@ -4563,45 +5015,352 @@
           <a:p>
             <a:r>
               <a:rPr kumimoji="1" lang="ja-JP" altLang="en-US" sz="2400" dirty="0"/>
-              <a:t>細かいテクニックはありますが、</a:t>
-            </a:r>
-            <a:endParaRPr kumimoji="1" lang="en-US" altLang="ja-JP" sz="2400" dirty="0"/>
-          </a:p>
-          <a:p>
-            <a:r>
-              <a:rPr lang="ja-JP" altLang="en-US" sz="2400" dirty="0"/>
-              <a:t>管理クラスについてはこれまでと特に変わりません。</a:t>
-            </a:r>
-            <a:endParaRPr lang="en-US" altLang="ja-JP" sz="2400" dirty="0"/>
-          </a:p>
-          <a:p>
-            <a:endParaRPr kumimoji="1" lang="en-US" altLang="ja-JP" sz="2400" dirty="0"/>
-          </a:p>
-          <a:p>
-            <a:r>
-              <a:rPr lang="ja-JP" altLang="en-US" sz="2400" dirty="0"/>
-              <a:t>続いて</a:t>
-            </a:r>
-            <a:r>
-              <a:rPr lang="ja-JP" altLang="en-US" sz="2400" b="1" dirty="0">
+              <a:t>別々にすることにより、</a:t>
+            </a:r>
+            <a:r>
+              <a:rPr kumimoji="1" lang="ja-JP" altLang="en-US" sz="2400" b="1" dirty="0">
                 <a:solidFill>
                   <a:srgbClr val="FF0000"/>
                 </a:solidFill>
               </a:rPr>
-              <a:t>ストラテジークラス</a:t>
+              <a:t>戦略の切り替えが容易</a:t>
+            </a:r>
+            <a:r>
+              <a:rPr kumimoji="1" lang="ja-JP" altLang="en-US" sz="2400" dirty="0"/>
+              <a:t>となります。</a:t>
+            </a:r>
+            <a:endParaRPr kumimoji="1" lang="en-US" altLang="ja-JP" sz="2400" dirty="0"/>
+          </a:p>
+          <a:p>
+            <a:r>
+              <a:rPr lang="en-US" altLang="ja-JP" sz="2400" b="1" dirty="0" err="1">
+                <a:solidFill>
+                  <a:srgbClr val="00B050"/>
+                </a:solidFill>
+              </a:rPr>
+              <a:t>AIPlayer</a:t>
             </a:r>
             <a:r>
               <a:rPr lang="ja-JP" altLang="en-US" sz="2400" dirty="0"/>
-              <a:t>について学習しましょう。</a:t>
-            </a:r>
-            <a:endParaRPr kumimoji="1" lang="en-US" altLang="ja-JP" sz="2400" dirty="0"/>
-          </a:p>
-        </p:txBody>
-      </p:sp>
+              <a:t>に戦略クラスを持たせれば、</a:t>
+            </a:r>
+            <a:endParaRPr lang="en-US" altLang="ja-JP" sz="2400" dirty="0"/>
+          </a:p>
+          <a:p>
+            <a:r>
+              <a:rPr kumimoji="1" lang="ja-JP" altLang="en-US" sz="2400" dirty="0"/>
+              <a:t>これを</a:t>
+            </a:r>
+            <a:r>
+              <a:rPr kumimoji="1" lang="ja-JP" altLang="en-US" sz="2400" b="1" dirty="0">
+                <a:solidFill>
+                  <a:srgbClr val="FF0000"/>
+                </a:solidFill>
+              </a:rPr>
+              <a:t>切り替えるだけで戦略を変えることができます。</a:t>
+            </a:r>
+            <a:endParaRPr kumimoji="1" lang="en-US" altLang="ja-JP" sz="2400" b="1" dirty="0">
+              <a:solidFill>
+                <a:srgbClr val="FF0000"/>
+              </a:solidFill>
+            </a:endParaRPr>
+          </a:p>
+        </p:txBody>
+      </p:sp>
+      <p:sp>
+        <p:nvSpPr>
+          <p:cNvPr id="19" name="思考の吹き出し: 雲形 18">
+            <a:extLst>
+              <a:ext uri="{FF2B5EF4-FFF2-40B4-BE49-F238E27FC236}">
+                <a16:creationId xmlns:a16="http://schemas.microsoft.com/office/drawing/2014/main" id="{6E3F716B-ED5D-4A1C-BBE2-6DF3C950FC8C}"/>
+              </a:ext>
+            </a:extLst>
+          </p:cNvPr>
+          <p:cNvSpPr/>
+          <p:nvPr/>
+        </p:nvSpPr>
+        <p:spPr>
+          <a:xfrm>
+            <a:off x="6073929" y="4324294"/>
+            <a:ext cx="2494951" cy="1409000"/>
+          </a:xfrm>
+          <a:prstGeom prst="cloudCallout">
+            <a:avLst/>
+          </a:prstGeom>
+        </p:spPr>
+        <p:style>
+          <a:lnRef idx="2">
+            <a:schemeClr val="accent5">
+              <a:shade val="50000"/>
+            </a:schemeClr>
+          </a:lnRef>
+          <a:fillRef idx="1">
+            <a:schemeClr val="accent5"/>
+          </a:fillRef>
+          <a:effectRef idx="0">
+            <a:schemeClr val="accent5"/>
+          </a:effectRef>
+          <a:fontRef idx="minor">
+            <a:schemeClr val="lt1"/>
+          </a:fontRef>
+        </p:style>
+        <p:txBody>
+          <a:bodyPr rtlCol="0" anchor="ctr"/>
+          <a:lstStyle/>
+          <a:p>
+            <a:pPr algn="ctr"/>
+            <a:r>
+              <a:rPr kumimoji="1" lang="ja-JP" altLang="en-US" b="1" dirty="0"/>
+              <a:t>逃げ腰戦略</a:t>
+            </a:r>
+            <a:endParaRPr kumimoji="1" lang="en-US" altLang="ja-JP" b="1" dirty="0"/>
+          </a:p>
+        </p:txBody>
+      </p:sp>
+      <p:sp>
+        <p:nvSpPr>
+          <p:cNvPr id="20" name="思考の吹き出し: 雲形 19">
+            <a:extLst>
+              <a:ext uri="{FF2B5EF4-FFF2-40B4-BE49-F238E27FC236}">
+                <a16:creationId xmlns:a16="http://schemas.microsoft.com/office/drawing/2014/main" id="{105B6806-1A30-4E49-BF2F-0F209C4C9AA4}"/>
+              </a:ext>
+            </a:extLst>
+          </p:cNvPr>
+          <p:cNvSpPr/>
+          <p:nvPr/>
+        </p:nvSpPr>
+        <p:spPr>
+          <a:xfrm>
+            <a:off x="3567382" y="5145813"/>
+            <a:ext cx="2494951" cy="1307891"/>
+          </a:xfrm>
+          <a:prstGeom prst="cloudCallout">
+            <a:avLst/>
+          </a:prstGeom>
+        </p:spPr>
+        <p:style>
+          <a:lnRef idx="2">
+            <a:schemeClr val="accent3">
+              <a:shade val="50000"/>
+            </a:schemeClr>
+          </a:lnRef>
+          <a:fillRef idx="1">
+            <a:schemeClr val="accent3"/>
+          </a:fillRef>
+          <a:effectRef idx="0">
+            <a:schemeClr val="accent3"/>
+          </a:effectRef>
+          <a:fontRef idx="minor">
+            <a:schemeClr val="lt1"/>
+          </a:fontRef>
+        </p:style>
+        <p:txBody>
+          <a:bodyPr rtlCol="0" anchor="ctr"/>
+          <a:lstStyle/>
+          <a:p>
+            <a:pPr algn="ctr"/>
+            <a:r>
+              <a:rPr kumimoji="1" lang="ja-JP" altLang="en-US" b="1" dirty="0"/>
+              <a:t>ランダム戦略</a:t>
+            </a:r>
+            <a:endParaRPr kumimoji="1" lang="en-US" altLang="ja-JP" b="1" dirty="0"/>
+          </a:p>
+        </p:txBody>
+      </p:sp>
+      <p:grpSp>
+        <p:nvGrpSpPr>
+          <p:cNvPr id="10" name="グループ化 9">
+            <a:extLst>
+              <a:ext uri="{FF2B5EF4-FFF2-40B4-BE49-F238E27FC236}">
+                <a16:creationId xmlns:a16="http://schemas.microsoft.com/office/drawing/2014/main" id="{2AF00D95-E4F6-4715-A6F7-AC6C4E653A0F}"/>
+              </a:ext>
+            </a:extLst>
+          </p:cNvPr>
+          <p:cNvGrpSpPr/>
+          <p:nvPr/>
+        </p:nvGrpSpPr>
+        <p:grpSpPr>
+          <a:xfrm>
+            <a:off x="708210" y="3543480"/>
+            <a:ext cx="6276107" cy="3027244"/>
+            <a:chOff x="708210" y="3543480"/>
+            <a:chExt cx="6276107" cy="3027244"/>
+          </a:xfrm>
+        </p:grpSpPr>
+        <p:grpSp>
+          <p:nvGrpSpPr>
+            <p:cNvPr id="11" name="グループ化 10">
+              <a:extLst>
+                <a:ext uri="{FF2B5EF4-FFF2-40B4-BE49-F238E27FC236}">
+                  <a16:creationId xmlns:a16="http://schemas.microsoft.com/office/drawing/2014/main" id="{A4D08B29-4DEC-40C3-8BE8-136BD30E8C69}"/>
+                </a:ext>
+              </a:extLst>
+            </p:cNvPr>
+            <p:cNvGrpSpPr/>
+            <p:nvPr/>
+          </p:nvGrpSpPr>
+          <p:grpSpPr>
+            <a:xfrm>
+              <a:off x="708210" y="3543480"/>
+              <a:ext cx="6276107" cy="3027244"/>
+              <a:chOff x="6571128" y="2871532"/>
+              <a:chExt cx="6276107" cy="3027244"/>
+            </a:xfrm>
+          </p:grpSpPr>
+          <p:sp>
+            <p:nvSpPr>
+              <p:cNvPr id="15" name="思考の吹き出し: 雲形 14">
+                <a:extLst>
+                  <a:ext uri="{FF2B5EF4-FFF2-40B4-BE49-F238E27FC236}">
+                    <a16:creationId xmlns:a16="http://schemas.microsoft.com/office/drawing/2014/main" id="{A8BA4CCB-978B-4DC7-B5A9-CEFBF67281F3}"/>
+                  </a:ext>
+                </a:extLst>
+              </p:cNvPr>
+              <p:cNvSpPr/>
+              <p:nvPr/>
+            </p:nvSpPr>
+            <p:spPr>
+              <a:xfrm>
+                <a:off x="10581930" y="2871532"/>
+                <a:ext cx="2265305" cy="1274093"/>
+              </a:xfrm>
+              <a:prstGeom prst="cloudCallout">
+                <a:avLst/>
+              </a:prstGeom>
+            </p:spPr>
+            <p:style>
+              <a:lnRef idx="2">
+                <a:schemeClr val="accent2">
+                  <a:shade val="50000"/>
+                </a:schemeClr>
+              </a:lnRef>
+              <a:fillRef idx="1">
+                <a:schemeClr val="accent2"/>
+              </a:fillRef>
+              <a:effectRef idx="0">
+                <a:schemeClr val="accent2"/>
+              </a:effectRef>
+              <a:fontRef idx="minor">
+                <a:schemeClr val="lt1"/>
+              </a:fontRef>
+            </p:style>
+            <p:txBody>
+              <a:bodyPr rtlCol="0" anchor="ctr"/>
+              <a:lstStyle/>
+              <a:p>
+                <a:pPr algn="ctr"/>
+                <a:r>
+                  <a:rPr kumimoji="1" lang="ja-JP" altLang="en-US" b="1" dirty="0"/>
+                  <a:t>攻撃的戦略</a:t>
+                </a:r>
+                <a:endParaRPr kumimoji="1" lang="en-US" altLang="ja-JP" b="1" dirty="0"/>
+              </a:p>
+            </p:txBody>
+          </p:sp>
+          <p:sp>
+            <p:nvSpPr>
+              <p:cNvPr id="16" name="スマイル 15">
+                <a:extLst>
+                  <a:ext uri="{FF2B5EF4-FFF2-40B4-BE49-F238E27FC236}">
+                    <a16:creationId xmlns:a16="http://schemas.microsoft.com/office/drawing/2014/main" id="{748D791A-0AB6-465E-BB0F-1CABAEE177BD}"/>
+                  </a:ext>
+                </a:extLst>
+              </p:cNvPr>
+              <p:cNvSpPr/>
+              <p:nvPr/>
+            </p:nvSpPr>
+            <p:spPr>
+              <a:xfrm>
+                <a:off x="6571128" y="4356846"/>
+                <a:ext cx="1667436" cy="1541930"/>
+              </a:xfrm>
+              <a:prstGeom prst="smileyFace">
+                <a:avLst/>
+              </a:prstGeom>
+              <a:solidFill>
+                <a:srgbClr val="FFFF00"/>
+              </a:solidFill>
+              <a:ln>
+                <a:solidFill>
+                  <a:schemeClr val="tx1"/>
+                </a:solidFill>
+              </a:ln>
+            </p:spPr>
+            <p:style>
+              <a:lnRef idx="2">
+                <a:schemeClr val="accent1">
+                  <a:shade val="50000"/>
+                </a:schemeClr>
+              </a:lnRef>
+              <a:fillRef idx="1">
+                <a:schemeClr val="accent1"/>
+              </a:fillRef>
+              <a:effectRef idx="0">
+                <a:schemeClr val="accent1"/>
+              </a:effectRef>
+              <a:fontRef idx="minor">
+                <a:schemeClr val="lt1"/>
+              </a:fontRef>
+            </p:style>
+            <p:txBody>
+              <a:bodyPr rtlCol="0" anchor="ctr"/>
+              <a:lstStyle/>
+              <a:p>
+                <a:pPr algn="ctr"/>
+                <a:endParaRPr kumimoji="1" lang="ja-JP" altLang="en-US" b="1" dirty="0">
+                  <a:solidFill>
+                    <a:srgbClr val="FF0000"/>
+                  </a:solidFill>
+                </a:endParaRPr>
+              </a:p>
+            </p:txBody>
+          </p:sp>
+        </p:grpSp>
+        <p:sp>
+          <p:nvSpPr>
+            <p:cNvPr id="21" name="テキスト ボックス 20">
+              <a:extLst>
+                <a:ext uri="{FF2B5EF4-FFF2-40B4-BE49-F238E27FC236}">
+                  <a16:creationId xmlns:a16="http://schemas.microsoft.com/office/drawing/2014/main" id="{4A37EC14-0EE2-4CAF-9B0E-BF8BE57F5E44}"/>
+                </a:ext>
+              </a:extLst>
+            </p:cNvPr>
+            <p:cNvSpPr txBox="1"/>
+            <p:nvPr/>
+          </p:nvSpPr>
+          <p:spPr>
+            <a:xfrm>
+              <a:off x="708210" y="4403009"/>
+              <a:ext cx="2954655" cy="461665"/>
+            </a:xfrm>
+            <a:prstGeom prst="rect">
+              <a:avLst/>
+            </a:prstGeom>
+            <a:noFill/>
+          </p:spPr>
+          <p:txBody>
+            <a:bodyPr wrap="none" rtlCol="0">
+              <a:spAutoFit/>
+            </a:bodyPr>
+            <a:lstStyle/>
+            <a:p>
+              <a:r>
+                <a:rPr kumimoji="1" lang="ja-JP" altLang="en-US" sz="2400" dirty="0"/>
+                <a:t>どれにしようかな？</a:t>
+              </a:r>
+              <a:endParaRPr kumimoji="1" lang="en-US" altLang="ja-JP" sz="2400" b="1" dirty="0">
+                <a:solidFill>
+                  <a:srgbClr val="FF0000"/>
+                </a:solidFill>
+              </a:endParaRPr>
+            </a:p>
+          </p:txBody>
+        </p:sp>
+      </p:grpSp>
     </p:spTree>
     <p:extLst>
       <p:ext uri="{BB962C8B-B14F-4D97-AF65-F5344CB8AC3E}">
-        <p14:creationId xmlns:p14="http://schemas.microsoft.com/office/powerpoint/2010/main" val="201994645"/>
+        <p14:creationId xmlns:p14="http://schemas.microsoft.com/office/powerpoint/2010/main" val="16681393"/>
       </p:ext>
     </p:extLst>
   </p:cSld>
@@ -4643,7 +5402,7 @@
         <p:spPr>
           <a:xfrm>
             <a:off x="567542" y="491954"/>
-            <a:ext cx="3877985" cy="584775"/>
+            <a:ext cx="1826141" cy="584775"/>
           </a:xfrm>
           <a:prstGeom prst="rect">
             <a:avLst/>
@@ -4658,7 +5417,7 @@
           <a:p>
             <a:r>
               <a:rPr kumimoji="1" lang="ja-JP" altLang="en-US" sz="3200" b="1" u="sng" dirty="0"/>
-              <a:t>ストラテジークラス</a:t>
+              <a:t>行動処理</a:t>
             </a:r>
             <a:endParaRPr kumimoji="1" lang="en-US" altLang="ja-JP" sz="3200" b="1" u="sng" dirty="0"/>
           </a:p>
@@ -4679,7 +5438,7 @@
         <p:spPr>
           <a:xfrm>
             <a:off x="567542" y="1216429"/>
-            <a:ext cx="10059164" cy="5262979"/>
+            <a:ext cx="8494633" cy="830997"/>
           </a:xfrm>
           <a:prstGeom prst="rect">
             <a:avLst/>
@@ -4693,22 +5452,34 @@
           <a:lstStyle/>
           <a:p>
             <a:r>
+              <a:rPr lang="ja-JP" altLang="en-US" sz="2400" dirty="0"/>
+              <a:t>つまりは、</a:t>
+            </a:r>
+            <a:r>
+              <a:rPr lang="ja-JP" altLang="en-US" sz="2400" b="1" dirty="0">
+                <a:solidFill>
+                  <a:srgbClr val="FF0000"/>
+                </a:solidFill>
+              </a:rPr>
+              <a:t>予め設計しておくということが重要</a:t>
+            </a:r>
+            <a:r>
+              <a:rPr lang="ja-JP" altLang="en-US" sz="2400" dirty="0"/>
+              <a:t>になります。</a:t>
+            </a:r>
+            <a:endParaRPr lang="en-US" altLang="ja-JP" sz="2400" dirty="0"/>
+          </a:p>
+          <a:p>
+            <a:r>
               <a:rPr kumimoji="1" lang="ja-JP" altLang="en-US" sz="2400" b="1" dirty="0">
                 <a:solidFill>
                   <a:srgbClr val="FF0000"/>
                 </a:solidFill>
               </a:rPr>
-              <a:t>ストラテジークラス</a:t>
-            </a:r>
-            <a:r>
-              <a:rPr kumimoji="1" lang="ja-JP" altLang="en-US" sz="2400" dirty="0"/>
-              <a:t>とは、</a:t>
-            </a:r>
-            <a:endParaRPr kumimoji="1" lang="en-US" altLang="ja-JP" sz="2400" dirty="0"/>
-          </a:p>
-          <a:p>
-            <a:r>
-              <a:rPr lang="en-US" altLang="ja-JP" sz="2400" b="1" dirty="0">
+              <a:t>行動と戦略を連携させなければ</a:t>
+            </a:r>
+            <a:r>
+              <a:rPr kumimoji="1" lang="en-US" altLang="ja-JP" sz="2400" b="1" dirty="0">
                 <a:solidFill>
                   <a:srgbClr val="FF0000"/>
                 </a:solidFill>
@@ -4716,647 +5487,39 @@
               <a:t>AI</a:t>
             </a:r>
             <a:r>
-              <a:rPr lang="ja-JP" altLang="en-US" sz="2400" b="1" dirty="0">
+              <a:rPr kumimoji="1" lang="ja-JP" altLang="en-US" sz="2400" b="1" dirty="0">
                 <a:solidFill>
                   <a:srgbClr val="FF0000"/>
                 </a:solidFill>
               </a:rPr>
-              <a:t>の戦略（ストラテジー）を決定させるクラス</a:t>
-            </a:r>
-            <a:r>
-              <a:rPr lang="ja-JP" altLang="en-US" sz="2400" dirty="0"/>
-              <a:t>です。</a:t>
-            </a:r>
-            <a:endParaRPr kumimoji="1" lang="en-US" altLang="ja-JP" sz="2400" dirty="0"/>
-          </a:p>
-          <a:p>
-            <a:r>
-              <a:rPr lang="ja-JP" altLang="en-US" sz="2400" dirty="0"/>
-              <a:t>ストラテジークラスが決定した戦略で</a:t>
-            </a:r>
-            <a:r>
-              <a:rPr lang="en-US" altLang="ja-JP" sz="2400" dirty="0"/>
-              <a:t>CPU</a:t>
-            </a:r>
-            <a:r>
-              <a:rPr lang="ja-JP" altLang="en-US" sz="2400" dirty="0"/>
-              <a:t>キャラクターを動かします。</a:t>
-            </a:r>
-            <a:endParaRPr lang="en-US" altLang="ja-JP" sz="2400" dirty="0"/>
-          </a:p>
-          <a:p>
-            <a:endParaRPr kumimoji="1" lang="en-US" altLang="ja-JP" sz="2400" dirty="0"/>
-          </a:p>
-          <a:p>
-            <a:r>
-              <a:rPr kumimoji="1" lang="ja-JP" altLang="en-US" sz="2400" dirty="0"/>
-              <a:t>注意することは、</a:t>
-            </a:r>
-            <a:endParaRPr kumimoji="1" lang="en-US" altLang="ja-JP" sz="2400" dirty="0"/>
-          </a:p>
-          <a:p>
-            <a:r>
-              <a:rPr lang="ja-JP" altLang="en-US" sz="2400" dirty="0"/>
-              <a:t>戦略を決めるだけで、</a:t>
-            </a:r>
-            <a:r>
-              <a:rPr lang="ja-JP" altLang="en-US" sz="2400" b="1" dirty="0">
-                <a:solidFill>
-                  <a:srgbClr val="FF0000"/>
-                </a:solidFill>
-              </a:rPr>
-              <a:t>ゲームに直接干渉させてはいけない</a:t>
-            </a:r>
-            <a:r>
-              <a:rPr lang="ja-JP" altLang="en-US" sz="2400" dirty="0"/>
-              <a:t>ことです。</a:t>
-            </a:r>
-            <a:endParaRPr lang="en-US" altLang="ja-JP" sz="2400" dirty="0"/>
-          </a:p>
-          <a:p>
-            <a:endParaRPr kumimoji="1" lang="en-US" altLang="ja-JP" sz="2400" dirty="0"/>
-          </a:p>
-          <a:p>
-            <a:r>
-              <a:rPr lang="ja-JP" altLang="en-US" sz="2400" b="1" dirty="0">
-                <a:solidFill>
-                  <a:srgbClr val="FF0000"/>
-                </a:solidFill>
-              </a:rPr>
-              <a:t>■ストラテジークラスの禁止事項</a:t>
-            </a:r>
-            <a:endParaRPr lang="en-US" altLang="ja-JP" sz="2400" b="1" dirty="0">
+              <a:t>は完成できません。</a:t>
+            </a:r>
+            <a:endParaRPr kumimoji="1" lang="en-US" altLang="ja-JP" sz="2400" b="1" dirty="0">
               <a:solidFill>
                 <a:srgbClr val="FF0000"/>
               </a:solidFill>
             </a:endParaRPr>
           </a:p>
-          <a:p>
-            <a:r>
-              <a:rPr kumimoji="1" lang="ja-JP" altLang="en-US" sz="2400" dirty="0"/>
-              <a:t>・オブジェクトを移動させる</a:t>
-            </a:r>
-            <a:endParaRPr kumimoji="1" lang="en-US" altLang="ja-JP" sz="2400" dirty="0"/>
-          </a:p>
-          <a:p>
-            <a:r>
-              <a:rPr lang="ja-JP" altLang="en-US" sz="2400" dirty="0"/>
-              <a:t>・オブジェクトのパラメータを変更する</a:t>
-            </a:r>
-            <a:endParaRPr lang="en-US" altLang="ja-JP" sz="2400" dirty="0"/>
-          </a:p>
-          <a:p>
-            <a:r>
-              <a:rPr kumimoji="1" lang="ja-JP" altLang="en-US" sz="2400" dirty="0"/>
-              <a:t>　・攻撃力を上げたりなど</a:t>
-            </a:r>
-            <a:endParaRPr kumimoji="1" lang="en-US" altLang="ja-JP" sz="2400" dirty="0"/>
-          </a:p>
-          <a:p>
-            <a:endParaRPr lang="en-US" altLang="ja-JP" sz="2400" dirty="0"/>
-          </a:p>
-          <a:p>
-            <a:r>
-              <a:rPr kumimoji="1" lang="ja-JP" altLang="en-US" sz="2400" dirty="0"/>
-              <a:t>これらの処理をすると、大元（プレイヤーや敵など）の役割と混在し、</a:t>
-            </a:r>
-            <a:endParaRPr kumimoji="1" lang="en-US" altLang="ja-JP" sz="2400" dirty="0"/>
-          </a:p>
-          <a:p>
-            <a:r>
-              <a:rPr lang="ja-JP" altLang="en-US" sz="2400" dirty="0"/>
-              <a:t>プログラムが複雑になってしまいます。</a:t>
-            </a:r>
-            <a:endParaRPr kumimoji="1" lang="en-US" altLang="ja-JP" sz="2400" dirty="0"/>
-          </a:p>
-        </p:txBody>
-      </p:sp>
-    </p:spTree>
-    <p:extLst>
-      <p:ext uri="{BB962C8B-B14F-4D97-AF65-F5344CB8AC3E}">
-        <p14:creationId xmlns:p14="http://schemas.microsoft.com/office/powerpoint/2010/main" val="3949839917"/>
-      </p:ext>
-    </p:extLst>
-  </p:cSld>
-  <p:clrMapOvr>
-    <a:masterClrMapping/>
-  </p:clrMapOvr>
-</p:sld>
-</file>
-
-<file path=ppt/slides/slide7.xml><?xml version="1.0" encoding="utf-8"?>
-<p:sld xmlns:a="http://schemas.openxmlformats.org/drawingml/2006/main" xmlns:r="http://schemas.openxmlformats.org/officeDocument/2006/relationships" xmlns:p="http://schemas.openxmlformats.org/presentationml/2006/main">
-  <p:cSld>
-    <p:spTree>
-      <p:nvGrpSpPr>
-        <p:cNvPr id="1" name=""/>
-        <p:cNvGrpSpPr/>
-        <p:nvPr/>
-      </p:nvGrpSpPr>
-      <p:grpSpPr>
-        <a:xfrm>
-          <a:off x="0" y="0"/>
-          <a:ext cx="0" cy="0"/>
-          <a:chOff x="0" y="0"/>
-          <a:chExt cx="0" cy="0"/>
-        </a:xfrm>
-      </p:grpSpPr>
-      <p:sp>
-        <p:nvSpPr>
-          <p:cNvPr id="4" name="テキスト ボックス 3">
-            <a:extLst>
-              <a:ext uri="{FF2B5EF4-FFF2-40B4-BE49-F238E27FC236}">
-                <a16:creationId xmlns:a16="http://schemas.microsoft.com/office/drawing/2014/main" id="{5A13BF46-B8C5-48AA-8308-C9ECFF431A18}"/>
-              </a:ext>
-            </a:extLst>
-          </p:cNvPr>
-          <p:cNvSpPr txBox="1"/>
+        </p:txBody>
+      </p:sp>
+      <p:sp>
+        <p:nvSpPr>
+          <p:cNvPr id="5" name="正方形/長方形 4">
+            <a:extLst>
+              <a:ext uri="{FF2B5EF4-FFF2-40B4-BE49-F238E27FC236}">
+                <a16:creationId xmlns:a16="http://schemas.microsoft.com/office/drawing/2014/main" id="{B3CF768A-6A86-4408-9599-917559891D06}"/>
+              </a:ext>
+            </a:extLst>
+          </p:cNvPr>
+          <p:cNvSpPr/>
           <p:nvPr/>
         </p:nvSpPr>
         <p:spPr>
           <a:xfrm>
-            <a:off x="567542" y="491954"/>
-            <a:ext cx="3877985" cy="584775"/>
+            <a:off x="4565801" y="2047426"/>
+            <a:ext cx="6400801" cy="2214282"/>
           </a:xfrm>
           <a:prstGeom prst="rect">
-            <a:avLst/>
-          </a:prstGeom>
-          <a:noFill/>
-        </p:spPr>
-        <p:txBody>
-          <a:bodyPr wrap="none" rtlCol="0">
-            <a:spAutoFit/>
-          </a:bodyPr>
-          <a:lstStyle/>
-          <a:p>
-            <a:r>
-              <a:rPr kumimoji="1" lang="ja-JP" altLang="en-US" sz="3200" b="1" u="sng" dirty="0"/>
-              <a:t>ストラテジークラス</a:t>
-            </a:r>
-            <a:endParaRPr kumimoji="1" lang="en-US" altLang="ja-JP" sz="3200" b="1" u="sng" dirty="0"/>
-          </a:p>
-        </p:txBody>
-      </p:sp>
-      <p:sp>
-        <p:nvSpPr>
-          <p:cNvPr id="6" name="テキスト ボックス 5">
-            <a:extLst>
-              <a:ext uri="{FF2B5EF4-FFF2-40B4-BE49-F238E27FC236}">
-                <a16:creationId xmlns:a16="http://schemas.microsoft.com/office/drawing/2014/main" id="{55830AD6-028B-4C4E-80BF-B70DFC1C3A46}"/>
-              </a:ext>
-            </a:extLst>
-          </p:cNvPr>
-          <p:cNvSpPr txBox="1"/>
-          <p:nvPr/>
-        </p:nvSpPr>
-        <p:spPr>
-          <a:xfrm>
-            <a:off x="567542" y="1216429"/>
-            <a:ext cx="6470041" cy="461665"/>
-          </a:xfrm>
-          <a:prstGeom prst="rect">
-            <a:avLst/>
-          </a:prstGeom>
-          <a:noFill/>
-        </p:spPr>
-        <p:txBody>
-          <a:bodyPr wrap="none" rtlCol="0">
-            <a:spAutoFit/>
-          </a:bodyPr>
-          <a:lstStyle/>
-          <a:p>
-            <a:r>
-              <a:rPr kumimoji="1" lang="en-US" altLang="ja-JP" sz="2400" b="1" dirty="0" err="1">
-                <a:solidFill>
-                  <a:srgbClr val="FF0000"/>
-                </a:solidFill>
-              </a:rPr>
-              <a:t>AIStrategyBase.h</a:t>
-            </a:r>
-            <a:r>
-              <a:rPr lang="ja-JP" altLang="en-US" sz="2400" dirty="0"/>
-              <a:t>にクラスを書きましょう。</a:t>
-            </a:r>
-            <a:endParaRPr kumimoji="1" lang="en-US" altLang="ja-JP" sz="2400" dirty="0"/>
-          </a:p>
-        </p:txBody>
-      </p:sp>
-      <p:pic>
-        <p:nvPicPr>
-          <p:cNvPr id="7" name="図 6">
-            <a:extLst>
-              <a:ext uri="{FF2B5EF4-FFF2-40B4-BE49-F238E27FC236}">
-                <a16:creationId xmlns:a16="http://schemas.microsoft.com/office/drawing/2014/main" id="{DD1E89D0-429E-4850-9C9F-C7FD5F760CAF}"/>
-              </a:ext>
-            </a:extLst>
-          </p:cNvPr>
-          <p:cNvPicPr>
-            <a:picLocks noChangeAspect="1"/>
-          </p:cNvPicPr>
-          <p:nvPr/>
-        </p:nvPicPr>
-        <p:blipFill>
-          <a:blip r:embed="rId2"/>
-          <a:stretch>
-            <a:fillRect/>
-          </a:stretch>
-        </p:blipFill>
-        <p:spPr>
-          <a:xfrm>
-            <a:off x="567543" y="1817795"/>
-            <a:ext cx="5427504" cy="4663688"/>
-          </a:xfrm>
-          <a:prstGeom prst="rect">
-            <a:avLst/>
-          </a:prstGeom>
-        </p:spPr>
-      </p:pic>
-    </p:spTree>
-    <p:extLst>
-      <p:ext uri="{BB962C8B-B14F-4D97-AF65-F5344CB8AC3E}">
-        <p14:creationId xmlns:p14="http://schemas.microsoft.com/office/powerpoint/2010/main" val="1856020626"/>
-      </p:ext>
-    </p:extLst>
-  </p:cSld>
-  <p:clrMapOvr>
-    <a:masterClrMapping/>
-  </p:clrMapOvr>
-</p:sld>
-</file>
-
-<file path=ppt/slides/slide8.xml><?xml version="1.0" encoding="utf-8"?>
-<p:sld xmlns:a="http://schemas.openxmlformats.org/drawingml/2006/main" xmlns:r="http://schemas.openxmlformats.org/officeDocument/2006/relationships" xmlns:p="http://schemas.openxmlformats.org/presentationml/2006/main">
-  <p:cSld>
-    <p:spTree>
-      <p:nvGrpSpPr>
-        <p:cNvPr id="1" name=""/>
-        <p:cNvGrpSpPr/>
-        <p:nvPr/>
-      </p:nvGrpSpPr>
-      <p:grpSpPr>
-        <a:xfrm>
-          <a:off x="0" y="0"/>
-          <a:ext cx="0" cy="0"/>
-          <a:chOff x="0" y="0"/>
-          <a:chExt cx="0" cy="0"/>
-        </a:xfrm>
-      </p:grpSpPr>
-      <p:sp>
-        <p:nvSpPr>
-          <p:cNvPr id="4" name="テキスト ボックス 3">
-            <a:extLst>
-              <a:ext uri="{FF2B5EF4-FFF2-40B4-BE49-F238E27FC236}">
-                <a16:creationId xmlns:a16="http://schemas.microsoft.com/office/drawing/2014/main" id="{5A13BF46-B8C5-48AA-8308-C9ECFF431A18}"/>
-              </a:ext>
-            </a:extLst>
-          </p:cNvPr>
-          <p:cNvSpPr txBox="1"/>
-          <p:nvPr/>
-        </p:nvSpPr>
-        <p:spPr>
-          <a:xfrm>
-            <a:off x="567542" y="491954"/>
-            <a:ext cx="3877985" cy="584775"/>
-          </a:xfrm>
-          <a:prstGeom prst="rect">
-            <a:avLst/>
-          </a:prstGeom>
-          <a:noFill/>
-        </p:spPr>
-        <p:txBody>
-          <a:bodyPr wrap="none" rtlCol="0">
-            <a:spAutoFit/>
-          </a:bodyPr>
-          <a:lstStyle/>
-          <a:p>
-            <a:r>
-              <a:rPr kumimoji="1" lang="ja-JP" altLang="en-US" sz="3200" b="1" u="sng" dirty="0"/>
-              <a:t>ストラテジークラス</a:t>
-            </a:r>
-            <a:endParaRPr kumimoji="1" lang="en-US" altLang="ja-JP" sz="3200" b="1" u="sng" dirty="0"/>
-          </a:p>
-        </p:txBody>
-      </p:sp>
-      <p:sp>
-        <p:nvSpPr>
-          <p:cNvPr id="6" name="テキスト ボックス 5">
-            <a:extLst>
-              <a:ext uri="{FF2B5EF4-FFF2-40B4-BE49-F238E27FC236}">
-                <a16:creationId xmlns:a16="http://schemas.microsoft.com/office/drawing/2014/main" id="{55830AD6-028B-4C4E-80BF-B70DFC1C3A46}"/>
-              </a:ext>
-            </a:extLst>
-          </p:cNvPr>
-          <p:cNvSpPr txBox="1"/>
-          <p:nvPr/>
-        </p:nvSpPr>
-        <p:spPr>
-          <a:xfrm>
-            <a:off x="567542" y="1216429"/>
-            <a:ext cx="4980851" cy="461665"/>
-          </a:xfrm>
-          <a:prstGeom prst="rect">
-            <a:avLst/>
-          </a:prstGeom>
-          <a:noFill/>
-        </p:spPr>
-        <p:txBody>
-          <a:bodyPr wrap="none" rtlCol="0">
-            <a:spAutoFit/>
-          </a:bodyPr>
-          <a:lstStyle/>
-          <a:p>
-            <a:r>
-              <a:rPr kumimoji="1" lang="en-US" altLang="ja-JP" sz="2400" b="1" dirty="0">
-                <a:solidFill>
-                  <a:srgbClr val="FF0000"/>
-                </a:solidFill>
-              </a:rPr>
-              <a:t>AIStrategyBase.cpp</a:t>
-            </a:r>
-            <a:r>
-              <a:rPr lang="ja-JP" altLang="en-US" sz="2400" dirty="0"/>
-              <a:t>を書きます。</a:t>
-            </a:r>
-            <a:endParaRPr kumimoji="1" lang="en-US" altLang="ja-JP" sz="2400" dirty="0"/>
-          </a:p>
-        </p:txBody>
-      </p:sp>
-      <p:pic>
-        <p:nvPicPr>
-          <p:cNvPr id="8" name="図 7">
-            <a:extLst>
-              <a:ext uri="{FF2B5EF4-FFF2-40B4-BE49-F238E27FC236}">
-                <a16:creationId xmlns:a16="http://schemas.microsoft.com/office/drawing/2014/main" id="{E6B10DC8-A1EA-4EA2-9045-DE3CDC5A5C93}"/>
-              </a:ext>
-            </a:extLst>
-          </p:cNvPr>
-          <p:cNvPicPr>
-            <a:picLocks noChangeAspect="1"/>
-          </p:cNvPicPr>
-          <p:nvPr/>
-        </p:nvPicPr>
-        <p:blipFill>
-          <a:blip r:embed="rId2"/>
-          <a:stretch>
-            <a:fillRect/>
-          </a:stretch>
-        </p:blipFill>
-        <p:spPr>
-          <a:xfrm>
-            <a:off x="567541" y="1817794"/>
-            <a:ext cx="5501617" cy="2933500"/>
-          </a:xfrm>
-          <a:prstGeom prst="rect">
-            <a:avLst/>
-          </a:prstGeom>
-        </p:spPr>
-      </p:pic>
-    </p:spTree>
-    <p:extLst>
-      <p:ext uri="{BB962C8B-B14F-4D97-AF65-F5344CB8AC3E}">
-        <p14:creationId xmlns:p14="http://schemas.microsoft.com/office/powerpoint/2010/main" val="1302813660"/>
-      </p:ext>
-    </p:extLst>
-  </p:cSld>
-  <p:clrMapOvr>
-    <a:masterClrMapping/>
-  </p:clrMapOvr>
-</p:sld>
-</file>
-
-<file path=ppt/slides/slide9.xml><?xml version="1.0" encoding="utf-8"?>
-<p:sld xmlns:a="http://schemas.openxmlformats.org/drawingml/2006/main" xmlns:r="http://schemas.openxmlformats.org/officeDocument/2006/relationships" xmlns:p="http://schemas.openxmlformats.org/presentationml/2006/main">
-  <p:cSld>
-    <p:spTree>
-      <p:nvGrpSpPr>
-        <p:cNvPr id="1" name=""/>
-        <p:cNvGrpSpPr/>
-        <p:nvPr/>
-      </p:nvGrpSpPr>
-      <p:grpSpPr>
-        <a:xfrm>
-          <a:off x="0" y="0"/>
-          <a:ext cx="0" cy="0"/>
-          <a:chOff x="0" y="0"/>
-          <a:chExt cx="0" cy="0"/>
-        </a:xfrm>
-      </p:grpSpPr>
-      <p:sp>
-        <p:nvSpPr>
-          <p:cNvPr id="4" name="テキスト ボックス 3">
-            <a:extLst>
-              <a:ext uri="{FF2B5EF4-FFF2-40B4-BE49-F238E27FC236}">
-                <a16:creationId xmlns:a16="http://schemas.microsoft.com/office/drawing/2014/main" id="{5A13BF46-B8C5-48AA-8308-C9ECFF431A18}"/>
-              </a:ext>
-            </a:extLst>
-          </p:cNvPr>
-          <p:cNvSpPr txBox="1"/>
-          <p:nvPr/>
-        </p:nvSpPr>
-        <p:spPr>
-          <a:xfrm>
-            <a:off x="567542" y="491954"/>
-            <a:ext cx="3877985" cy="584775"/>
-          </a:xfrm>
-          <a:prstGeom prst="rect">
-            <a:avLst/>
-          </a:prstGeom>
-          <a:noFill/>
-        </p:spPr>
-        <p:txBody>
-          <a:bodyPr wrap="none" rtlCol="0">
-            <a:spAutoFit/>
-          </a:bodyPr>
-          <a:lstStyle/>
-          <a:p>
-            <a:r>
-              <a:rPr kumimoji="1" lang="ja-JP" altLang="en-US" sz="3200" b="1" u="sng" dirty="0"/>
-              <a:t>ストラテジークラス</a:t>
-            </a:r>
-            <a:endParaRPr kumimoji="1" lang="en-US" altLang="ja-JP" sz="3200" b="1" u="sng" dirty="0"/>
-          </a:p>
-        </p:txBody>
-      </p:sp>
-      <p:sp>
-        <p:nvSpPr>
-          <p:cNvPr id="6" name="テキスト ボックス 5">
-            <a:extLst>
-              <a:ext uri="{FF2B5EF4-FFF2-40B4-BE49-F238E27FC236}">
-                <a16:creationId xmlns:a16="http://schemas.microsoft.com/office/drawing/2014/main" id="{55830AD6-028B-4C4E-80BF-B70DFC1C3A46}"/>
-              </a:ext>
-            </a:extLst>
-          </p:cNvPr>
-          <p:cNvSpPr txBox="1"/>
-          <p:nvPr/>
-        </p:nvSpPr>
-        <p:spPr>
-          <a:xfrm>
-            <a:off x="567542" y="1216429"/>
-            <a:ext cx="8042586" cy="461665"/>
-          </a:xfrm>
-          <a:prstGeom prst="rect">
-            <a:avLst/>
-          </a:prstGeom>
-          <a:noFill/>
-        </p:spPr>
-        <p:txBody>
-          <a:bodyPr wrap="none" rtlCol="0">
-            <a:spAutoFit/>
-          </a:bodyPr>
-          <a:lstStyle/>
-          <a:p>
-            <a:r>
-              <a:rPr kumimoji="1" lang="en-US" altLang="ja-JP" sz="2400" b="1" dirty="0" err="1">
-                <a:solidFill>
-                  <a:srgbClr val="00B050"/>
-                </a:solidFill>
-              </a:rPr>
-              <a:t>AIStrategyBase</a:t>
-            </a:r>
-            <a:r>
-              <a:rPr kumimoji="1" lang="ja-JP" altLang="en-US" sz="2400" b="1" dirty="0">
-                <a:solidFill>
-                  <a:srgbClr val="00B050"/>
-                </a:solidFill>
-              </a:rPr>
-              <a:t>クラス</a:t>
-            </a:r>
-            <a:r>
-              <a:rPr kumimoji="1" lang="ja-JP" altLang="en-US" sz="2400" dirty="0"/>
-              <a:t>をベースに様々な</a:t>
-            </a:r>
-            <a:r>
-              <a:rPr kumimoji="1" lang="en-US" altLang="ja-JP" sz="2400" dirty="0"/>
-              <a:t>AI</a:t>
-            </a:r>
-            <a:r>
-              <a:rPr kumimoji="1" lang="ja-JP" altLang="en-US" sz="2400" dirty="0"/>
-              <a:t>を作ります。</a:t>
-            </a:r>
-            <a:endParaRPr kumimoji="1" lang="en-US" altLang="ja-JP" sz="2400" dirty="0"/>
-          </a:p>
-        </p:txBody>
-      </p:sp>
-      <p:sp>
-        <p:nvSpPr>
-          <p:cNvPr id="2" name="四角形: 角を丸くする 1">
-            <a:extLst>
-              <a:ext uri="{FF2B5EF4-FFF2-40B4-BE49-F238E27FC236}">
-                <a16:creationId xmlns:a16="http://schemas.microsoft.com/office/drawing/2014/main" id="{28653728-BCC9-4694-B3F7-154A9492B165}"/>
-              </a:ext>
-            </a:extLst>
-          </p:cNvPr>
-          <p:cNvSpPr/>
-          <p:nvPr/>
-        </p:nvSpPr>
-        <p:spPr>
-          <a:xfrm>
-            <a:off x="567542" y="3644169"/>
-            <a:ext cx="2115671" cy="981635"/>
-          </a:xfrm>
-          <a:prstGeom prst="roundRect">
-            <a:avLst/>
-          </a:prstGeom>
-        </p:spPr>
-        <p:style>
-          <a:lnRef idx="2">
-            <a:schemeClr val="accent6">
-              <a:shade val="50000"/>
-            </a:schemeClr>
-          </a:lnRef>
-          <a:fillRef idx="1">
-            <a:schemeClr val="accent6"/>
-          </a:fillRef>
-          <a:effectRef idx="0">
-            <a:schemeClr val="accent6"/>
-          </a:effectRef>
-          <a:fontRef idx="minor">
-            <a:schemeClr val="lt1"/>
-          </a:fontRef>
-        </p:style>
-        <p:txBody>
-          <a:bodyPr rtlCol="0" anchor="ctr"/>
-          <a:lstStyle/>
-          <a:p>
-            <a:pPr algn="ctr"/>
-            <a:r>
-              <a:rPr kumimoji="1" lang="en-US" altLang="ja-JP" b="1" dirty="0" err="1"/>
-              <a:t>AIStrategyBase</a:t>
-            </a:r>
-            <a:endParaRPr kumimoji="1" lang="ja-JP" altLang="en-US" b="1" dirty="0"/>
-          </a:p>
-        </p:txBody>
-      </p:sp>
-      <p:sp>
-        <p:nvSpPr>
-          <p:cNvPr id="7" name="四角形: 角を丸くする 6">
-            <a:extLst>
-              <a:ext uri="{FF2B5EF4-FFF2-40B4-BE49-F238E27FC236}">
-                <a16:creationId xmlns:a16="http://schemas.microsoft.com/office/drawing/2014/main" id="{7335B8E9-0F0E-4C2B-A7E3-7117A25FBE9B}"/>
-              </a:ext>
-            </a:extLst>
-          </p:cNvPr>
-          <p:cNvSpPr/>
-          <p:nvPr/>
-        </p:nvSpPr>
-        <p:spPr>
-          <a:xfrm>
-            <a:off x="5198559" y="2124071"/>
-            <a:ext cx="2115671" cy="981635"/>
-          </a:xfrm>
-          <a:prstGeom prst="roundRect">
-            <a:avLst/>
-          </a:prstGeom>
-        </p:spPr>
-        <p:style>
-          <a:lnRef idx="3">
-            <a:schemeClr val="lt1"/>
-          </a:lnRef>
-          <a:fillRef idx="1">
-            <a:schemeClr val="accent2"/>
-          </a:fillRef>
-          <a:effectRef idx="1">
-            <a:schemeClr val="accent2"/>
-          </a:effectRef>
-          <a:fontRef idx="minor">
-            <a:schemeClr val="lt1"/>
-          </a:fontRef>
-        </p:style>
-        <p:txBody>
-          <a:bodyPr rtlCol="0" anchor="ctr"/>
-          <a:lstStyle/>
-          <a:p>
-            <a:pPr algn="ctr"/>
-            <a:r>
-              <a:rPr kumimoji="1" lang="ja-JP" altLang="en-US" b="1" dirty="0"/>
-              <a:t>攻撃的な</a:t>
-            </a:r>
-            <a:r>
-              <a:rPr kumimoji="1" lang="en-US" altLang="ja-JP" b="1" dirty="0"/>
-              <a:t>AI</a:t>
-            </a:r>
-            <a:endParaRPr kumimoji="1" lang="ja-JP" altLang="en-US" b="1" dirty="0"/>
-          </a:p>
-        </p:txBody>
-      </p:sp>
-      <p:sp>
-        <p:nvSpPr>
-          <p:cNvPr id="9" name="四角形: 角を丸くする 8">
-            <a:extLst>
-              <a:ext uri="{FF2B5EF4-FFF2-40B4-BE49-F238E27FC236}">
-                <a16:creationId xmlns:a16="http://schemas.microsoft.com/office/drawing/2014/main" id="{6A637600-8CC4-4680-88EB-283B06C35446}"/>
-              </a:ext>
-            </a:extLst>
-          </p:cNvPr>
-          <p:cNvSpPr/>
-          <p:nvPr/>
-        </p:nvSpPr>
-        <p:spPr>
-          <a:xfrm>
-            <a:off x="5198558" y="3677788"/>
-            <a:ext cx="2115671" cy="981635"/>
-          </a:xfrm>
-          <a:prstGeom prst="roundRect">
             <a:avLst/>
           </a:prstGeom>
         </p:spPr>
@@ -5377,28 +5540,144 @@
           </a:fontRef>
         </p:style>
         <p:txBody>
-          <a:bodyPr rtlCol="0" anchor="ctr"/>
-          <a:lstStyle/>
-          <a:p>
-            <a:pPr algn="ctr"/>
-            <a:r>
-              <a:rPr kumimoji="1" lang="ja-JP" altLang="en-US" b="1" dirty="0"/>
-              <a:t>逃げ腰な</a:t>
-            </a:r>
-            <a:r>
-              <a:rPr kumimoji="1" lang="en-US" altLang="ja-JP" b="1" dirty="0"/>
-              <a:t>AI</a:t>
-            </a:r>
-            <a:endParaRPr kumimoji="1" lang="ja-JP" altLang="en-US" b="1" dirty="0"/>
-          </a:p>
-        </p:txBody>
-      </p:sp>
-      <p:sp>
-        <p:nvSpPr>
-          <p:cNvPr id="10" name="四角形: 角を丸くする 9">
-            <a:extLst>
-              <a:ext uri="{FF2B5EF4-FFF2-40B4-BE49-F238E27FC236}">
-                <a16:creationId xmlns:a16="http://schemas.microsoft.com/office/drawing/2014/main" id="{6E6DA8BA-1671-44C8-AD20-CFAB3426342A}"/>
+          <a:bodyPr rtlCol="0" anchor="t"/>
+          <a:lstStyle/>
+          <a:p>
+            <a:r>
+              <a:rPr lang="ja-JP" altLang="en-US" b="1" dirty="0"/>
+              <a:t>戦略</a:t>
+            </a:r>
+            <a:r>
+              <a:rPr lang="en-US" altLang="ja-JP" b="1" dirty="0"/>
+              <a:t>A</a:t>
+            </a:r>
+          </a:p>
+          <a:p>
+            <a:endParaRPr lang="en-US" altLang="ja-JP" b="1" dirty="0"/>
+          </a:p>
+          <a:p>
+            <a:r>
+              <a:rPr lang="ja-JP" altLang="en-US" b="1" dirty="0"/>
+              <a:t>・プレイヤーとの距離が遠ければ</a:t>
+            </a:r>
+            <a:r>
+              <a:rPr lang="ja-JP" altLang="en-US" b="1" dirty="0">
+                <a:solidFill>
+                  <a:srgbClr val="FFFF00"/>
+                </a:solidFill>
+              </a:rPr>
+              <a:t>プレイヤーに近づく</a:t>
+            </a:r>
+            <a:endParaRPr lang="en-US" altLang="ja-JP" b="1" dirty="0">
+              <a:solidFill>
+                <a:srgbClr val="FFFF00"/>
+              </a:solidFill>
+            </a:endParaRPr>
+          </a:p>
+          <a:p>
+            <a:r>
+              <a:rPr lang="ja-JP" altLang="en-US" b="1" dirty="0"/>
+              <a:t>・近くにアイテムが落ちていれば</a:t>
+            </a:r>
+            <a:r>
+              <a:rPr lang="ja-JP" altLang="en-US" b="1" dirty="0">
+                <a:solidFill>
+                  <a:srgbClr val="FFFF00"/>
+                </a:solidFill>
+              </a:rPr>
+              <a:t>アイテムを取りに行く</a:t>
+            </a:r>
+            <a:endParaRPr lang="en-US" altLang="ja-JP" b="1" dirty="0">
+              <a:solidFill>
+                <a:srgbClr val="FFFF00"/>
+              </a:solidFill>
+            </a:endParaRPr>
+          </a:p>
+          <a:p>
+            <a:r>
+              <a:rPr lang="ja-JP" altLang="en-US" b="1" dirty="0"/>
+              <a:t>・プレイヤーとの距離が近ければ</a:t>
+            </a:r>
+            <a:r>
+              <a:rPr lang="ja-JP" altLang="en-US" b="1" dirty="0">
+                <a:solidFill>
+                  <a:srgbClr val="FFFF00"/>
+                </a:solidFill>
+              </a:rPr>
+              <a:t>攻撃する</a:t>
+            </a:r>
+            <a:endParaRPr lang="en-US" altLang="ja-JP" b="1" dirty="0">
+              <a:solidFill>
+                <a:srgbClr val="FFFF00"/>
+              </a:solidFill>
+            </a:endParaRPr>
+          </a:p>
+          <a:p>
+            <a:r>
+              <a:rPr lang="ja-JP" altLang="en-US" b="1" dirty="0"/>
+              <a:t>・残りの</a:t>
+            </a:r>
+            <a:r>
+              <a:rPr lang="en-US" altLang="ja-JP" b="1" dirty="0"/>
+              <a:t>HP</a:t>
+            </a:r>
+            <a:r>
+              <a:rPr lang="ja-JP" altLang="en-US" b="1" dirty="0"/>
+              <a:t>が少なければ</a:t>
+            </a:r>
+            <a:r>
+              <a:rPr lang="ja-JP" altLang="en-US" b="1" dirty="0">
+                <a:solidFill>
+                  <a:srgbClr val="FFFF00"/>
+                </a:solidFill>
+              </a:rPr>
+              <a:t>プレイヤーから逃げる</a:t>
+            </a:r>
+            <a:endParaRPr lang="en-US" altLang="ja-JP" b="1" dirty="0">
+              <a:solidFill>
+                <a:srgbClr val="FFFF00"/>
+              </a:solidFill>
+            </a:endParaRPr>
+          </a:p>
+          <a:p>
+            <a:r>
+              <a:rPr lang="ja-JP" altLang="en-US" b="1" dirty="0">
+                <a:solidFill>
+                  <a:schemeClr val="bg1"/>
+                </a:solidFill>
+              </a:rPr>
+              <a:t>・強さレベルが高いほど</a:t>
+            </a:r>
+            <a:r>
+              <a:rPr lang="ja-JP" altLang="en-US" b="1" dirty="0">
+                <a:solidFill>
+                  <a:srgbClr val="FFFF00"/>
+                </a:solidFill>
+              </a:rPr>
+              <a:t>行動</a:t>
+            </a:r>
+            <a:r>
+              <a:rPr lang="ja-JP" altLang="en-US" b="1" dirty="0">
+                <a:solidFill>
+                  <a:schemeClr val="bg1"/>
+                </a:solidFill>
+              </a:rPr>
+              <a:t>の切り替えが早くなる</a:t>
+            </a:r>
+            <a:endParaRPr lang="en-US" altLang="ja-JP" b="1" dirty="0">
+              <a:solidFill>
+                <a:schemeClr val="bg1"/>
+              </a:solidFill>
+            </a:endParaRPr>
+          </a:p>
+        </p:txBody>
+      </p:sp>
+      <p:sp>
+        <p:nvSpPr>
+          <p:cNvPr id="7" name="正方形/長方形 6">
+            <a:extLst>
+              <a:ext uri="{FF2B5EF4-FFF2-40B4-BE49-F238E27FC236}">
+                <a16:creationId xmlns:a16="http://schemas.microsoft.com/office/drawing/2014/main" id="{E0A5B3E0-0B23-421A-B083-39235D2964DF}"/>
               </a:ext>
             </a:extLst>
           </p:cNvPr>
@@ -5407,187 +5686,181 @@
         </p:nvSpPr>
         <p:spPr>
           <a:xfrm>
-            <a:off x="5198558" y="5150240"/>
-            <a:ext cx="2115671" cy="981635"/>
+            <a:off x="567542" y="2047426"/>
+            <a:ext cx="3487271" cy="2214282"/>
           </a:xfrm>
-          <a:prstGeom prst="roundRect">
+          <a:prstGeom prst="rect">
             <a:avLst/>
           </a:prstGeom>
         </p:spPr>
         <p:style>
           <a:lnRef idx="2">
-            <a:schemeClr val="accent3">
+            <a:schemeClr val="accent4">
               <a:shade val="50000"/>
             </a:schemeClr>
           </a:lnRef>
           <a:fillRef idx="1">
-            <a:schemeClr val="accent3"/>
+            <a:schemeClr val="accent4"/>
           </a:fillRef>
           <a:effectRef idx="0">
-            <a:schemeClr val="accent3"/>
+            <a:schemeClr val="accent4"/>
           </a:effectRef>
           <a:fontRef idx="minor">
             <a:schemeClr val="lt1"/>
           </a:fontRef>
         </p:style>
         <p:txBody>
-          <a:bodyPr rtlCol="0" anchor="ctr"/>
-          <a:lstStyle/>
-          <a:p>
-            <a:pPr algn="ctr"/>
-            <a:r>
-              <a:rPr kumimoji="1" lang="ja-JP" altLang="en-US" b="1" dirty="0"/>
-              <a:t>ランダムに動く</a:t>
-            </a:r>
-            <a:r>
-              <a:rPr kumimoji="1" lang="en-US" altLang="ja-JP" b="1" dirty="0"/>
-              <a:t>AI</a:t>
-            </a:r>
-            <a:endParaRPr kumimoji="1" lang="ja-JP" altLang="en-US" b="1" dirty="0"/>
-          </a:p>
-        </p:txBody>
-      </p:sp>
-      <p:cxnSp>
-        <p:nvCxnSpPr>
-          <p:cNvPr id="5" name="直線矢印コネクタ 4">
-            <a:extLst>
-              <a:ext uri="{FF2B5EF4-FFF2-40B4-BE49-F238E27FC236}">
-                <a16:creationId xmlns:a16="http://schemas.microsoft.com/office/drawing/2014/main" id="{9E5CA14F-2C99-4041-87CE-313C6F8AB350}"/>
-              </a:ext>
-            </a:extLst>
-          </p:cNvPr>
-          <p:cNvCxnSpPr>
-            <a:stCxn id="2" idx="3"/>
-            <a:endCxn id="7" idx="1"/>
-          </p:cNvCxnSpPr>
+          <a:bodyPr rtlCol="0" anchor="t"/>
+          <a:lstStyle/>
+          <a:p>
+            <a:r>
+              <a:rPr lang="ja-JP" altLang="en-US" b="1" dirty="0"/>
+              <a:t>行動</a:t>
+            </a:r>
+            <a:endParaRPr lang="en-US" altLang="ja-JP" b="1" dirty="0"/>
+          </a:p>
+          <a:p>
+            <a:r>
+              <a:rPr lang="ja-JP" altLang="en-US" b="1" dirty="0"/>
+              <a:t>・プレイヤーに近づく</a:t>
+            </a:r>
+            <a:endParaRPr lang="en-US" altLang="ja-JP" b="1" dirty="0"/>
+          </a:p>
+          <a:p>
+            <a:r>
+              <a:rPr lang="ja-JP" altLang="en-US" b="1" dirty="0"/>
+              <a:t>・アイテムを取りに行く</a:t>
+            </a:r>
+            <a:endParaRPr lang="en-US" altLang="ja-JP" b="1" dirty="0"/>
+          </a:p>
+          <a:p>
+            <a:r>
+              <a:rPr lang="ja-JP" altLang="en-US" b="1" dirty="0"/>
+              <a:t>・プレイヤーから逃げる</a:t>
+            </a:r>
+            <a:endParaRPr lang="en-US" altLang="ja-JP" b="1" dirty="0"/>
+          </a:p>
+          <a:p>
+            <a:r>
+              <a:rPr lang="ja-JP" altLang="en-US" b="1" dirty="0"/>
+              <a:t>・攻撃する</a:t>
+            </a:r>
+            <a:endParaRPr lang="en-US" altLang="ja-JP" b="1" dirty="0"/>
+          </a:p>
+        </p:txBody>
+      </p:sp>
+      <p:sp>
+        <p:nvSpPr>
+          <p:cNvPr id="8" name="正方形/長方形 7">
+            <a:extLst>
+              <a:ext uri="{FF2B5EF4-FFF2-40B4-BE49-F238E27FC236}">
+                <a16:creationId xmlns:a16="http://schemas.microsoft.com/office/drawing/2014/main" id="{FE48F063-C498-4BEE-8ECD-2FB2CD69FC96}"/>
+              </a:ext>
+            </a:extLst>
+          </p:cNvPr>
+          <p:cNvSpPr/>
           <p:nvPr/>
-        </p:nvCxnSpPr>
+        </p:nvSpPr>
         <p:spPr>
-          <a:xfrm flipV="1">
-            <a:off x="2683213" y="2614889"/>
-            <a:ext cx="2515346" cy="1520098"/>
+          <a:xfrm>
+            <a:off x="4565801" y="4512720"/>
+            <a:ext cx="6400801" cy="2214282"/>
           </a:xfrm>
-          <a:prstGeom prst="straightConnector1">
+          <a:prstGeom prst="rect">
             <a:avLst/>
           </a:prstGeom>
-          <a:ln w="38100">
-            <a:solidFill>
-              <a:srgbClr val="FF0000"/>
-            </a:solidFill>
-            <a:tailEnd type="triangle"/>
-          </a:ln>
         </p:spPr>
         <p:style>
-          <a:lnRef idx="1">
-            <a:schemeClr val="accent1"/>
+          <a:lnRef idx="2">
+            <a:schemeClr val="accent1">
+              <a:shade val="50000"/>
+            </a:schemeClr>
           </a:lnRef>
-          <a:fillRef idx="0">
+          <a:fillRef idx="1">
             <a:schemeClr val="accent1"/>
           </a:fillRef>
           <a:effectRef idx="0">
             <a:schemeClr val="accent1"/>
           </a:effectRef>
           <a:fontRef idx="minor">
-            <a:schemeClr val="tx1"/>
+            <a:schemeClr val="lt1"/>
           </a:fontRef>
         </p:style>
-      </p:cxnSp>
-      <p:cxnSp>
-        <p:nvCxnSpPr>
-          <p:cNvPr id="12" name="直線矢印コネクタ 11">
-            <a:extLst>
-              <a:ext uri="{FF2B5EF4-FFF2-40B4-BE49-F238E27FC236}">
-                <a16:creationId xmlns:a16="http://schemas.microsoft.com/office/drawing/2014/main" id="{EC75617C-F642-40ED-B102-B0190F439D63}"/>
-              </a:ext>
-            </a:extLst>
-          </p:cNvPr>
-          <p:cNvCxnSpPr>
-            <a:cxnSpLocks/>
-            <a:stCxn id="2" idx="3"/>
-            <a:endCxn id="9" idx="1"/>
-          </p:cNvCxnSpPr>
-          <p:nvPr/>
-        </p:nvCxnSpPr>
-        <p:spPr>
-          <a:xfrm>
-            <a:off x="2683213" y="4134987"/>
-            <a:ext cx="2515345" cy="33619"/>
-          </a:xfrm>
-          <a:prstGeom prst="straightConnector1">
-            <a:avLst/>
-          </a:prstGeom>
-          <a:ln w="38100">
-            <a:solidFill>
-              <a:srgbClr val="FF0000"/>
-            </a:solidFill>
-            <a:tailEnd type="triangle"/>
-          </a:ln>
-        </p:spPr>
-        <p:style>
-          <a:lnRef idx="1">
-            <a:schemeClr val="accent1"/>
-          </a:lnRef>
-          <a:fillRef idx="0">
-            <a:schemeClr val="accent1"/>
-          </a:fillRef>
-          <a:effectRef idx="0">
-            <a:schemeClr val="accent1"/>
-          </a:effectRef>
-          <a:fontRef idx="minor">
-            <a:schemeClr val="tx1"/>
-          </a:fontRef>
-        </p:style>
-      </p:cxnSp>
-      <p:cxnSp>
-        <p:nvCxnSpPr>
-          <p:cNvPr id="15" name="直線矢印コネクタ 14">
-            <a:extLst>
-              <a:ext uri="{FF2B5EF4-FFF2-40B4-BE49-F238E27FC236}">
-                <a16:creationId xmlns:a16="http://schemas.microsoft.com/office/drawing/2014/main" id="{243E94D2-DAE0-43FE-A94B-D1D637B50C87}"/>
-              </a:ext>
-            </a:extLst>
-          </p:cNvPr>
-          <p:cNvCxnSpPr>
-            <a:cxnSpLocks/>
-            <a:stCxn id="2" idx="3"/>
-            <a:endCxn id="10" idx="1"/>
-          </p:cNvCxnSpPr>
-          <p:nvPr/>
-        </p:nvCxnSpPr>
-        <p:spPr>
-          <a:xfrm>
-            <a:off x="2683213" y="4134987"/>
-            <a:ext cx="2515345" cy="1506071"/>
-          </a:xfrm>
-          <a:prstGeom prst="straightConnector1">
-            <a:avLst/>
-          </a:prstGeom>
-          <a:ln w="38100">
-            <a:solidFill>
-              <a:srgbClr val="FF0000"/>
-            </a:solidFill>
-            <a:tailEnd type="triangle"/>
-          </a:ln>
-        </p:spPr>
-        <p:style>
-          <a:lnRef idx="1">
-            <a:schemeClr val="accent1"/>
-          </a:lnRef>
-          <a:fillRef idx="0">
-            <a:schemeClr val="accent1"/>
-          </a:fillRef>
-          <a:effectRef idx="0">
-            <a:schemeClr val="accent1"/>
-          </a:effectRef>
-          <a:fontRef idx="minor">
-            <a:schemeClr val="tx1"/>
-          </a:fontRef>
-        </p:style>
-      </p:cxnSp>
+        <p:txBody>
+          <a:bodyPr rtlCol="0" anchor="t"/>
+          <a:lstStyle/>
+          <a:p>
+            <a:r>
+              <a:rPr lang="ja-JP" altLang="en-US" b="1" dirty="0"/>
+              <a:t>戦略</a:t>
+            </a:r>
+            <a:r>
+              <a:rPr lang="en-US" altLang="ja-JP" b="1" dirty="0"/>
+              <a:t>B</a:t>
+            </a:r>
+          </a:p>
+          <a:p>
+            <a:endParaRPr lang="en-US" altLang="ja-JP" b="1" dirty="0"/>
+          </a:p>
+          <a:p>
+            <a:r>
+              <a:rPr lang="ja-JP" altLang="en-US" b="1" dirty="0"/>
+              <a:t>・５秒ごとに</a:t>
+            </a:r>
+            <a:r>
+              <a:rPr lang="ja-JP" altLang="en-US" b="1" dirty="0">
+                <a:solidFill>
+                  <a:srgbClr val="FFFF00"/>
+                </a:solidFill>
+              </a:rPr>
+              <a:t>行動</a:t>
+            </a:r>
+            <a:r>
+              <a:rPr lang="ja-JP" altLang="en-US" b="1" dirty="0"/>
+              <a:t>の中からランダムな行動をとる</a:t>
+            </a:r>
+            <a:endParaRPr lang="en-US" altLang="ja-JP" b="1" dirty="0"/>
+          </a:p>
+          <a:p>
+            <a:r>
+              <a:rPr lang="ja-JP" altLang="en-US" b="1" dirty="0">
+                <a:solidFill>
+                  <a:schemeClr val="bg1"/>
+                </a:solidFill>
+              </a:rPr>
+              <a:t>・強さレベルが高いほど</a:t>
+            </a:r>
+            <a:r>
+              <a:rPr lang="ja-JP" altLang="en-US" b="1" dirty="0">
+                <a:solidFill>
+                  <a:srgbClr val="FFFF00"/>
+                </a:solidFill>
+              </a:rPr>
+              <a:t>攻撃する行動</a:t>
+            </a:r>
+            <a:r>
+              <a:rPr lang="ja-JP" altLang="en-US" b="1" dirty="0">
+                <a:solidFill>
+                  <a:schemeClr val="bg1"/>
+                </a:solidFill>
+              </a:rPr>
+              <a:t>を選びやすくなる</a:t>
+            </a:r>
+            <a:endParaRPr lang="en-US" altLang="ja-JP" b="1" dirty="0">
+              <a:solidFill>
+                <a:schemeClr val="bg1"/>
+              </a:solidFill>
+            </a:endParaRPr>
+          </a:p>
+          <a:p>
+            <a:endParaRPr lang="en-US" altLang="ja-JP" b="1" dirty="0"/>
+          </a:p>
+        </p:txBody>
+      </p:sp>
     </p:spTree>
     <p:extLst>
       <p:ext uri="{BB962C8B-B14F-4D97-AF65-F5344CB8AC3E}">
-        <p14:creationId xmlns:p14="http://schemas.microsoft.com/office/powerpoint/2010/main" val="508117650"/>
+        <p14:creationId xmlns:p14="http://schemas.microsoft.com/office/powerpoint/2010/main" val="4003405729"/>
       </p:ext>
     </p:extLst>
   </p:cSld>
